--- a/assets/figures-editable/c1-c2/c2-e05.pptx
+++ b/assets/figures-editable/c1-c2/c2-e05.pptx
@@ -7,7 +7,7 @@
   <p:sldIdLst>
     <p:sldId id="256" r:id="rId7"/>
   </p:sldIdLst>
-  <p:sldSz cx="11948160" cy="7924799" type="screen4x3"/>
+  <p:sldSz cx="12191695" cy="6858000" type="screen4x3"/>
   <p:notesSz cx="6858000" cy="9144000"/>
   <p:defaultTextStyle>
     <a:defPPr>
@@ -3098,14 +3098,14 @@
       <p:grpSpPr/>
       <p:sp>
         <p:nvSpPr>
-          <p:cNvPr id="2" name="text1" descr="sci-ppt:C2-E05-001"/>
+          <p:cNvPr id="2" name="C2-E05 text 0" descr="sci-ppt:o000"/>
           <p:cNvSpPr txBox="1"/>
           <p:nvPr/>
         </p:nvSpPr>
         <p:spPr>
           <a:xfrm>
-            <a:off x="316992" y="268224"/>
-            <a:ext cx="11277600" cy="359054"/>
+            <a:off x="274320" y="118872"/>
+            <a:ext cx="11612880" cy="340105"/>
           </a:xfrm>
           <a:prstGeom prst="rect">
             <a:avLst/>
@@ -3114,7 +3114,7 @@
           <a:effectLst/>
         </p:spPr>
         <p:txBody>
-          <a:bodyPr wrap="none" lIns="27432" rIns="27432" tIns="18288" bIns="18288" anchor="ctr">
+          <a:bodyPr wrap="none" lIns="18288" rIns="18288" tIns="18288" bIns="18288" anchor="t">
             <a:spAutoFit/>
           </a:bodyPr>
           <a:lstStyle/>
@@ -3125,37 +3125,37 @@
               </a:spcAft>
             </a:pPr>
             <a:r>
-              <a:rPr sz="1823" b="0" i="0">
+              <a:rPr sz="1900" b="1" i="0">
                 <a:solidFill>
                   <a:srgbClr val="8EDBD4"/>
                 </a:solidFill>
                 <a:latin typeface="Arial"/>
               </a:rPr>
-              <a:t>C2-E05 | Physical-variable diagram</a:t>
-            </a:r>
-          </a:p>
-        </p:txBody>
-      </p:sp>
-      <p:sp>
-        <p:nvSpPr>
-          <p:cNvPr id="3" name="rect2" descr="sci-ppt:C2-E05-002"/>
+              <a:t>C2-E05 · Beer–Lambert constitutive model and solution</a:t>
+            </a:r>
+          </a:p>
+        </p:txBody>
+      </p:sp>
+      <p:sp>
+        <p:nvSpPr>
+          <p:cNvPr id="3" name="C2-E05 round_rect 1" descr="sci-ppt:o001"/>
           <p:cNvSpPr/>
           <p:nvPr/>
         </p:nvSpPr>
         <p:spPr>
           <a:xfrm>
-            <a:off x="3779520" y="1341120"/>
-            <a:ext cx="3169920" cy="2743200"/>
-          </a:xfrm>
-          <a:prstGeom prst="rect">
+            <a:off x="365760" y="914400"/>
+            <a:ext cx="4023360" cy="4846320"/>
+          </a:xfrm>
+          <a:prstGeom prst="roundRect">
             <a:avLst/>
           </a:prstGeom>
           <a:solidFill>
             <a:srgbClr val="213E4B"/>
           </a:solidFill>
-          <a:ln w="19050">
+          <a:ln w="20320">
             <a:solidFill>
-              <a:srgbClr val="B4C7D2"/>
+              <a:srgbClr val="8EDBD4"/>
             </a:solidFill>
           </a:ln>
           <a:effectLst/>
@@ -3168,45 +3168,345 @@
           </a:p>
         </p:txBody>
       </p:sp>
+      <p:sp>
+        <p:nvSpPr>
+          <p:cNvPr id="4" name="C2-E05 text 2" descr="sci-ppt:o002"/>
+          <p:cNvSpPr txBox="1"/>
+          <p:nvPr/>
+        </p:nvSpPr>
+        <p:spPr>
+          <a:xfrm>
+            <a:off x="475488" y="969264"/>
+            <a:ext cx="3803904" cy="254889"/>
+          </a:xfrm>
+          <a:prstGeom prst="rect">
+            <a:avLst/>
+          </a:prstGeom>
+          <a:noFill/>
+          <a:effectLst/>
+        </p:spPr>
+        <p:txBody>
+          <a:bodyPr wrap="none" lIns="18288" rIns="18288" tIns="18288" bIns="18288" anchor="t">
+            <a:spAutoFit/>
+          </a:bodyPr>
+          <a:lstStyle/>
+          <a:p>
+            <a:pPr algn="l">
+              <a:spcAft>
+                <a:spcPts val="0"/>
+              </a:spcAft>
+            </a:pPr>
+            <a:r>
+              <a:rPr sz="1350" b="1" i="0">
+                <a:solidFill>
+                  <a:srgbClr val="8EDBD4"/>
+                </a:solidFill>
+                <a:latin typeface="Arial"/>
+              </a:rPr>
+              <a:t>Light entering an absorber</a:t>
+            </a:r>
+          </a:p>
+        </p:txBody>
+      </p:sp>
+      <p:sp>
+        <p:nvSpPr>
+          <p:cNvPr id="5" name="C2-E05 rect 3" descr="sci-ppt:o003"/>
+          <p:cNvSpPr/>
+          <p:nvPr/>
+        </p:nvSpPr>
+        <p:spPr>
+          <a:xfrm>
+            <a:off x="914400" y="1828800"/>
+            <a:ext cx="2926080" cy="3291840"/>
+          </a:xfrm>
+          <a:prstGeom prst="rect">
+            <a:avLst/>
+          </a:prstGeom>
+          <a:solidFill>
+            <a:srgbClr val="1E4A5A"/>
+          </a:solidFill>
+          <a:ln w="17780">
+            <a:solidFill>
+              <a:srgbClr val="2B6678"/>
+            </a:solidFill>
+          </a:ln>
+          <a:effectLst/>
+        </p:spPr>
+        <p:txBody>
+          <a:bodyPr rtlCol="0" anchor="ctr"/>
+          <a:lstStyle/>
+          <a:p>
+            <a:pPr algn="ctr"/>
+          </a:p>
+        </p:txBody>
+      </p:sp>
+      <p:sp>
+        <p:nvSpPr>
+          <p:cNvPr id="6" name="C2-E05 rect 4" descr="sci-ppt:o004"/>
+          <p:cNvSpPr/>
+          <p:nvPr/>
+        </p:nvSpPr>
+        <p:spPr>
+          <a:xfrm>
+            <a:off x="914400" y="1828800"/>
+            <a:ext cx="2926080" cy="457200"/>
+          </a:xfrm>
+          <a:prstGeom prst="rect">
+            <a:avLst/>
+          </a:prstGeom>
+          <a:solidFill>
+            <a:srgbClr val="F2B880">
+              <a:alpha val="55000"/>
+            </a:srgbClr>
+          </a:solidFill>
+          <a:ln>
+            <a:solidFill>
+              <a:srgbClr val="F2B880">
+                <a:alpha val="55000"/>
+              </a:srgbClr>
+            </a:solidFill>
+          </a:ln>
+          <a:effectLst/>
+        </p:spPr>
+        <p:txBody>
+          <a:bodyPr rtlCol="0" anchor="ctr"/>
+          <a:lstStyle/>
+          <a:p>
+            <a:pPr algn="ctr"/>
+          </a:p>
+        </p:txBody>
+      </p:sp>
+      <p:sp>
+        <p:nvSpPr>
+          <p:cNvPr id="7" name="C2-E05 rect 5" descr="sci-ppt:o005"/>
+          <p:cNvSpPr/>
+          <p:nvPr/>
+        </p:nvSpPr>
+        <p:spPr>
+          <a:xfrm>
+            <a:off x="914400" y="2286000"/>
+            <a:ext cx="2926080" cy="457200"/>
+          </a:xfrm>
+          <a:prstGeom prst="rect">
+            <a:avLst/>
+          </a:prstGeom>
+          <a:solidFill>
+            <a:srgbClr val="F2B880">
+              <a:alpha val="31556"/>
+            </a:srgbClr>
+          </a:solidFill>
+          <a:ln>
+            <a:solidFill>
+              <a:srgbClr val="F2B880">
+                <a:alpha val="31556"/>
+              </a:srgbClr>
+            </a:solidFill>
+          </a:ln>
+          <a:effectLst/>
+        </p:spPr>
+        <p:txBody>
+          <a:bodyPr rtlCol="0" anchor="ctr"/>
+          <a:lstStyle/>
+          <a:p>
+            <a:pPr algn="ctr"/>
+          </a:p>
+        </p:txBody>
+      </p:sp>
+      <p:sp>
+        <p:nvSpPr>
+          <p:cNvPr id="8" name="C2-E05 rect 6" descr="sci-ppt:o006"/>
+          <p:cNvSpPr/>
+          <p:nvPr/>
+        </p:nvSpPr>
+        <p:spPr>
+          <a:xfrm>
+            <a:off x="914400" y="2743200"/>
+            <a:ext cx="2926080" cy="457200"/>
+          </a:xfrm>
+          <a:prstGeom prst="rect">
+            <a:avLst/>
+          </a:prstGeom>
+          <a:solidFill>
+            <a:srgbClr val="F2B880">
+              <a:alpha val="18106"/>
+            </a:srgbClr>
+          </a:solidFill>
+          <a:ln>
+            <a:solidFill>
+              <a:srgbClr val="F2B880">
+                <a:alpha val="18106"/>
+              </a:srgbClr>
+            </a:solidFill>
+          </a:ln>
+          <a:effectLst/>
+        </p:spPr>
+        <p:txBody>
+          <a:bodyPr rtlCol="0" anchor="ctr"/>
+          <a:lstStyle/>
+          <a:p>
+            <a:pPr algn="ctr"/>
+          </a:p>
+        </p:txBody>
+      </p:sp>
+      <p:sp>
+        <p:nvSpPr>
+          <p:cNvPr id="9" name="C2-E05 rect 7" descr="sci-ppt:o007"/>
+          <p:cNvSpPr/>
+          <p:nvPr/>
+        </p:nvSpPr>
+        <p:spPr>
+          <a:xfrm>
+            <a:off x="914400" y="3200400"/>
+            <a:ext cx="2926080" cy="457200"/>
+          </a:xfrm>
+          <a:prstGeom prst="rect">
+            <a:avLst/>
+          </a:prstGeom>
+          <a:solidFill>
+            <a:srgbClr val="F2B880">
+              <a:alpha val="10388"/>
+            </a:srgbClr>
+          </a:solidFill>
+          <a:ln>
+            <a:solidFill>
+              <a:srgbClr val="F2B880">
+                <a:alpha val="10388"/>
+              </a:srgbClr>
+            </a:solidFill>
+          </a:ln>
+          <a:effectLst/>
+        </p:spPr>
+        <p:txBody>
+          <a:bodyPr rtlCol="0" anchor="ctr"/>
+          <a:lstStyle/>
+          <a:p>
+            <a:pPr algn="ctr"/>
+          </a:p>
+        </p:txBody>
+      </p:sp>
+      <p:sp>
+        <p:nvSpPr>
+          <p:cNvPr id="10" name="C2-E05 rect 8" descr="sci-ppt:o008"/>
+          <p:cNvSpPr/>
+          <p:nvPr/>
+        </p:nvSpPr>
+        <p:spPr>
+          <a:xfrm>
+            <a:off x="914400" y="3657600"/>
+            <a:ext cx="2926080" cy="457200"/>
+          </a:xfrm>
+          <a:prstGeom prst="rect">
+            <a:avLst/>
+          </a:prstGeom>
+          <a:solidFill>
+            <a:srgbClr val="F2B880">
+              <a:alpha val="5960"/>
+            </a:srgbClr>
+          </a:solidFill>
+          <a:ln>
+            <a:solidFill>
+              <a:srgbClr val="F2B880">
+                <a:alpha val="5960"/>
+              </a:srgbClr>
+            </a:solidFill>
+          </a:ln>
+          <a:effectLst/>
+        </p:spPr>
+        <p:txBody>
+          <a:bodyPr rtlCol="0" anchor="ctr"/>
+          <a:lstStyle/>
+          <a:p>
+            <a:pPr algn="ctr"/>
+          </a:p>
+        </p:txBody>
+      </p:sp>
+      <p:sp>
+        <p:nvSpPr>
+          <p:cNvPr id="11" name="C2-E05 rect 9" descr="sci-ppt:o009"/>
+          <p:cNvSpPr/>
+          <p:nvPr/>
+        </p:nvSpPr>
+        <p:spPr>
+          <a:xfrm>
+            <a:off x="914400" y="4114800"/>
+            <a:ext cx="2926080" cy="457200"/>
+          </a:xfrm>
+          <a:prstGeom prst="rect">
+            <a:avLst/>
+          </a:prstGeom>
+          <a:solidFill>
+            <a:srgbClr val="F2B880">
+              <a:alpha val="3420"/>
+            </a:srgbClr>
+          </a:solidFill>
+          <a:ln>
+            <a:solidFill>
+              <a:srgbClr val="F2B880">
+                <a:alpha val="3420"/>
+              </a:srgbClr>
+            </a:solidFill>
+          </a:ln>
+          <a:effectLst/>
+        </p:spPr>
+        <p:txBody>
+          <a:bodyPr rtlCol="0" anchor="ctr"/>
+          <a:lstStyle/>
+          <a:p>
+            <a:pPr algn="ctr"/>
+          </a:p>
+        </p:txBody>
+      </p:sp>
+      <p:sp>
+        <p:nvSpPr>
+          <p:cNvPr id="12" name="C2-E05 rect 10" descr="sci-ppt:o010"/>
+          <p:cNvSpPr/>
+          <p:nvPr/>
+        </p:nvSpPr>
+        <p:spPr>
+          <a:xfrm>
+            <a:off x="914400" y="4572000"/>
+            <a:ext cx="2926080" cy="457200"/>
+          </a:xfrm>
+          <a:prstGeom prst="rect">
+            <a:avLst/>
+          </a:prstGeom>
+          <a:solidFill>
+            <a:srgbClr val="F2B880">
+              <a:alpha val="1962"/>
+            </a:srgbClr>
+          </a:solidFill>
+          <a:ln>
+            <a:solidFill>
+              <a:srgbClr val="F2B880">
+                <a:alpha val="1962"/>
+              </a:srgbClr>
+            </a:solidFill>
+          </a:ln>
+          <a:effectLst/>
+        </p:spPr>
+        <p:txBody>
+          <a:bodyPr rtlCol="0" anchor="ctr"/>
+          <a:lstStyle/>
+          <a:p>
+            <a:pPr algn="ctr"/>
+          </a:p>
+        </p:txBody>
+      </p:sp>
       <p:cxnSp>
         <p:nvCxnSpPr>
-          <p:cNvPr id="4" name="arrow3" descr="sci-ppt:C2-E05-003"/>
+          <p:cNvPr id="13" name="C2-E05 arrow 11" descr="sci-ppt:o011"/>
           <p:cNvCxnSpPr/>
           <p:nvPr/>
         </p:nvCxnSpPr>
         <p:spPr>
           <a:xfrm>
-            <a:off x="1097280" y="2499360"/>
-            <a:ext cx="2560320" cy="0"/>
+            <a:off x="1371600" y="1371600"/>
+            <a:ext cx="0" cy="411480"/>
           </a:xfrm>
           <a:prstGeom prst="line">
             <a:avLst/>
           </a:prstGeom>
-          <a:ln w="25400">
-            <a:solidFill>
-              <a:srgbClr val="F6BC77"/>
-            </a:solidFill>
-            <a:headEnd type="none" w="med" len="med"/>
-            <a:tailEnd type="triangle" w="med" len="med"/>
-          </a:ln>
-          <a:effectLst/>
-        </p:spPr>
-      </p:cxnSp>
-      <p:cxnSp>
-        <p:nvCxnSpPr>
-          <p:cNvPr id="5" name="arrow4" descr="sci-ppt:C2-E05-004"/>
-          <p:cNvCxnSpPr/>
-          <p:nvPr/>
-        </p:nvCxnSpPr>
-        <p:spPr>
-          <a:xfrm>
-            <a:off x="7010400" y="2499360"/>
-            <a:ext cx="2621280" cy="0"/>
-          </a:xfrm>
-          <a:prstGeom prst="line">
-            <a:avLst/>
-          </a:prstGeom>
-          <a:ln w="25400">
+          <a:ln w="30480">
             <a:solidFill>
               <a:srgbClr val="8EDBD4"/>
             </a:solidFill>
@@ -3218,19 +3518,19 @@
       </p:cxnSp>
       <p:cxnSp>
         <p:nvCxnSpPr>
-          <p:cNvPr id="6" name="arrow5" descr="sci-ppt:C2-E05-005"/>
+          <p:cNvPr id="14" name="C2-E05 arrow 12" descr="sci-ppt:o012"/>
           <p:cNvCxnSpPr/>
           <p:nvPr/>
         </p:nvCxnSpPr>
         <p:spPr>
-          <a:xfrm flipH="1" flipV="1">
-            <a:off x="2316480" y="1402080"/>
-            <a:ext cx="1463040" cy="1097280"/>
+          <a:xfrm>
+            <a:off x="2057400" y="1371600"/>
+            <a:ext cx="0" cy="289965"/>
           </a:xfrm>
           <a:prstGeom prst="line">
             <a:avLst/>
           </a:prstGeom>
-          <a:ln w="25400">
+          <a:ln w="30480">
             <a:solidFill>
               <a:srgbClr val="8EDBD4"/>
             </a:solidFill>
@@ -3240,181 +3540,21 @@
           <a:effectLst/>
         </p:spPr>
       </p:cxnSp>
-      <p:sp>
-        <p:nvSpPr>
-          <p:cNvPr id="7" name="text6" descr="sci-ppt:C2-E05-006"/>
-          <p:cNvSpPr txBox="1"/>
-          <p:nvPr/>
-        </p:nvSpPr>
-        <p:spPr>
-          <a:xfrm>
-            <a:off x="853440" y="2926080"/>
-            <a:ext cx="2804160" cy="359054"/>
-          </a:xfrm>
-          <a:prstGeom prst="rect">
-            <a:avLst/>
-          </a:prstGeom>
-          <a:noFill/>
-          <a:effectLst/>
-        </p:spPr>
-        <p:txBody>
-          <a:bodyPr wrap="none" lIns="27432" rIns="27432" tIns="18288" bIns="18288" anchor="ctr">
-            <a:spAutoFit/>
-          </a:bodyPr>
-          <a:lstStyle/>
-          <a:p>
-            <a:pPr algn="l">
-              <a:spcAft>
-                <a:spcPts val="0"/>
-              </a:spcAft>
-            </a:pPr>
-            <a:r>
-              <a:rPr sz="1823" b="0" i="0">
-                <a:solidFill>
-                  <a:srgbClr val="E7F0F3"/>
-                </a:solidFill>
-                <a:latin typeface="Arial"/>
-              </a:rPr>
-              <a:t>Incident light</a:t>
-            </a:r>
-          </a:p>
-        </p:txBody>
-      </p:sp>
-      <p:sp>
-        <p:nvSpPr>
-          <p:cNvPr id="8" name="text7" descr="sci-ppt:C2-E05-007"/>
-          <p:cNvSpPr txBox="1"/>
-          <p:nvPr/>
-        </p:nvSpPr>
-        <p:spPr>
-          <a:xfrm>
-            <a:off x="853440" y="975360"/>
-            <a:ext cx="2804160" cy="340156"/>
-          </a:xfrm>
-          <a:prstGeom prst="rect">
-            <a:avLst/>
-          </a:prstGeom>
-          <a:noFill/>
-          <a:effectLst/>
-        </p:spPr>
-        <p:txBody>
-          <a:bodyPr wrap="none" lIns="27432" rIns="27432" tIns="18288" bIns="18288" anchor="ctr">
-            <a:spAutoFit/>
-          </a:bodyPr>
-          <a:lstStyle/>
-          <a:p>
-            <a:pPr algn="l">
-              <a:spcAft>
-                <a:spcPts val="0"/>
-              </a:spcAft>
-            </a:pPr>
-            <a:r>
-              <a:rPr sz="1728" b="0" i="0">
-                <a:solidFill>
-                  <a:srgbClr val="E7F0F3"/>
-                </a:solidFill>
-                <a:latin typeface="Arial"/>
-              </a:rPr>
-              <a:t>Reflection</a:t>
-            </a:r>
-          </a:p>
-        </p:txBody>
-      </p:sp>
-      <p:sp>
-        <p:nvSpPr>
-          <p:cNvPr id="9" name="text8" descr="sci-ppt:C2-E05-008"/>
-          <p:cNvSpPr txBox="1"/>
-          <p:nvPr/>
-        </p:nvSpPr>
-        <p:spPr>
-          <a:xfrm>
-            <a:off x="4084320" y="3048000"/>
-            <a:ext cx="3048000" cy="359054"/>
-          </a:xfrm>
-          <a:prstGeom prst="rect">
-            <a:avLst/>
-          </a:prstGeom>
-          <a:noFill/>
-          <a:effectLst/>
-        </p:spPr>
-        <p:txBody>
-          <a:bodyPr wrap="none" lIns="27432" rIns="27432" tIns="18288" bIns="18288" anchor="ctr">
-            <a:spAutoFit/>
-          </a:bodyPr>
-          <a:lstStyle/>
-          <a:p>
-            <a:pPr algn="l">
-              <a:spcAft>
-                <a:spcPts val="0"/>
-              </a:spcAft>
-            </a:pPr>
-            <a:r>
-              <a:rPr sz="1823" b="0" i="0">
-                <a:solidFill>
-                  <a:srgbClr val="E7F0F3"/>
-                </a:solidFill>
-                <a:latin typeface="Arial"/>
-              </a:rPr>
-              <a:t>Absorber: Q_abs</a:t>
-            </a:r>
-          </a:p>
-        </p:txBody>
-      </p:sp>
-      <p:sp>
-        <p:nvSpPr>
-          <p:cNvPr id="10" name="text9" descr="sci-ppt:C2-E05-009"/>
-          <p:cNvSpPr txBox="1"/>
-          <p:nvPr/>
-        </p:nvSpPr>
-        <p:spPr>
-          <a:xfrm>
-            <a:off x="7315200" y="2926080"/>
-            <a:ext cx="3657600" cy="359054"/>
-          </a:xfrm>
-          <a:prstGeom prst="rect">
-            <a:avLst/>
-          </a:prstGeom>
-          <a:noFill/>
-          <a:effectLst/>
-        </p:spPr>
-        <p:txBody>
-          <a:bodyPr wrap="none" lIns="27432" rIns="27432" tIns="18288" bIns="18288" anchor="ctr">
-            <a:spAutoFit/>
-          </a:bodyPr>
-          <a:lstStyle/>
-          <a:p>
-            <a:pPr algn="l">
-              <a:spcAft>
-                <a:spcPts val="0"/>
-              </a:spcAft>
-            </a:pPr>
-            <a:r>
-              <a:rPr sz="1823" b="0" i="0">
-                <a:solidFill>
-                  <a:srgbClr val="E7F0F3"/>
-                </a:solidFill>
-                <a:latin typeface="Arial"/>
-              </a:rPr>
-              <a:t>Transmitted light</a:t>
-            </a:r>
-          </a:p>
-        </p:txBody>
-      </p:sp>
       <p:cxnSp>
         <p:nvCxnSpPr>
-          <p:cNvPr id="11" name="arrow10" descr="sci-ppt:C2-E05-010"/>
+          <p:cNvPr id="15" name="C2-E05 arrow 13" descr="sci-ppt:o013"/>
           <p:cNvCxnSpPr/>
           <p:nvPr/>
         </p:nvCxnSpPr>
         <p:spPr>
           <a:xfrm>
-            <a:off x="4023360" y="3779520"/>
-            <a:ext cx="2682240" cy="0"/>
+            <a:off x="2743200" y="1371600"/>
+            <a:ext cx="0" cy="204334"/>
           </a:xfrm>
           <a:prstGeom prst="line">
             <a:avLst/>
           </a:prstGeom>
-          <a:ln w="25400">
+          <a:ln w="30480">
             <a:solidFill>
               <a:srgbClr val="8EDBD4"/>
             </a:solidFill>
@@ -3424,16 +3564,40 @@
           <a:effectLst/>
         </p:spPr>
       </p:cxnSp>
-      <p:sp>
-        <p:nvSpPr>
-          <p:cNvPr id="12" name="text11" descr="sci-ppt:C2-E05-011"/>
+      <p:cxnSp>
+        <p:nvCxnSpPr>
+          <p:cNvPr id="16" name="C2-E05 arrow 14" descr="sci-ppt:o014"/>
+          <p:cNvCxnSpPr/>
+          <p:nvPr/>
+        </p:nvCxnSpPr>
+        <p:spPr>
+          <a:xfrm>
+            <a:off x="3429000" y="1371600"/>
+            <a:ext cx="0" cy="143992"/>
+          </a:xfrm>
+          <a:prstGeom prst="line">
+            <a:avLst/>
+          </a:prstGeom>
+          <a:ln w="30480">
+            <a:solidFill>
+              <a:srgbClr val="8EDBD4"/>
+            </a:solidFill>
+            <a:headEnd type="none" w="med" len="med"/>
+            <a:tailEnd type="triangle" w="med" len="med"/>
+          </a:ln>
+          <a:effectLst/>
+        </p:spPr>
+      </p:cxnSp>
+      <p:sp>
+        <p:nvSpPr>
+          <p:cNvPr id="17" name="C2-E05 text 15" descr="sci-ppt:o015"/>
           <p:cNvSpPr txBox="1"/>
           <p:nvPr/>
         </p:nvSpPr>
         <p:spPr>
           <a:xfrm>
-            <a:off x="4511040" y="4023360"/>
-            <a:ext cx="4267200" cy="340156"/>
+            <a:off x="502920" y="5212080"/>
+            <a:ext cx="3749039" cy="417576"/>
           </a:xfrm>
           <a:prstGeom prst="rect">
             <a:avLst/>
@@ -3442,7 +3606,7 @@
           <a:effectLst/>
         </p:spPr>
         <p:txBody>
-          <a:bodyPr wrap="none" lIns="27432" rIns="27432" tIns="18288" bIns="18288" anchor="ctr">
+          <a:bodyPr wrap="none" lIns="18288" rIns="18288" tIns="18288" bIns="18288" anchor="t">
             <a:spAutoFit/>
           </a:bodyPr>
           <a:lstStyle/>
@@ -3453,27 +3617,131 @@
               </a:spcAft>
             </a:pPr>
             <a:r>
-              <a:rPr sz="1728" b="0" i="0">
+              <a:rPr sz="1200" b="0" i="0">
                 <a:solidFill>
                   <a:srgbClr val="E7F0F3"/>
                 </a:solidFill>
                 <a:latin typeface="Arial"/>
               </a:rPr>
-              <a:t>+z; thickness h_a</a:t>
-            </a:r>
-          </a:p>
-        </p:txBody>
-      </p:sp>
-      <p:sp>
-        <p:nvSpPr>
-          <p:cNvPr id="13" name="text12" descr="sci-ppt:C2-E05-012"/>
+              <a:t>Deeper layers see less light, so they heat</a:t>
+            </a:r>
+          </a:p>
+          <a:p>
+            <a:pPr algn="l">
+              <a:spcAft>
+                <a:spcPts val="0"/>
+              </a:spcAft>
+            </a:pPr>
+            <a:r>
+              <a:rPr sz="1200" b="0" i="0">
+                <a:solidFill>
+                  <a:srgbClr val="E7F0F3"/>
+                </a:solidFill>
+                <a:latin typeface="Arial"/>
+              </a:rPr>
+              <a:t>less: Q_abs = μₐ I(z).</a:t>
+            </a:r>
+          </a:p>
+        </p:txBody>
+      </p:sp>
+      <p:cxnSp>
+        <p:nvCxnSpPr>
+          <p:cNvPr id="18" name="C2-E05 line 16" descr="sci-ppt:o016"/>
+          <p:cNvCxnSpPr/>
+          <p:nvPr/>
+        </p:nvCxnSpPr>
+        <p:spPr>
+          <a:xfrm>
+            <a:off x="5577840" y="5029200"/>
+            <a:ext cx="6035040" cy="0"/>
+          </a:xfrm>
+          <a:prstGeom prst="line">
+            <a:avLst/>
+          </a:prstGeom>
+          <a:ln w="19050">
+            <a:solidFill>
+              <a:srgbClr val="B4C7D2"/>
+            </a:solidFill>
+          </a:ln>
+          <a:effectLst/>
+        </p:spPr>
+      </p:cxnSp>
+      <p:cxnSp>
+        <p:nvCxnSpPr>
+          <p:cNvPr id="19" name="C2-E05 line 17" descr="sci-ppt:o017"/>
+          <p:cNvCxnSpPr/>
+          <p:nvPr/>
+        </p:nvCxnSpPr>
+        <p:spPr>
+          <a:xfrm>
+            <a:off x="5577840" y="1371600"/>
+            <a:ext cx="0" cy="3657600"/>
+          </a:xfrm>
+          <a:prstGeom prst="line">
+            <a:avLst/>
+          </a:prstGeom>
+          <a:ln w="19050">
+            <a:solidFill>
+              <a:srgbClr val="B4C7D2"/>
+            </a:solidFill>
+          </a:ln>
+          <a:effectLst/>
+        </p:spPr>
+      </p:cxnSp>
+      <p:cxnSp>
+        <p:nvCxnSpPr>
+          <p:cNvPr id="20" name="C2-E05 line 18" descr="sci-ppt:o018"/>
+          <p:cNvCxnSpPr/>
+          <p:nvPr/>
+        </p:nvCxnSpPr>
+        <p:spPr>
+          <a:xfrm>
+            <a:off x="5577840" y="5029200"/>
+            <a:ext cx="0" cy="64008"/>
+          </a:xfrm>
+          <a:prstGeom prst="line">
+            <a:avLst/>
+          </a:prstGeom>
+          <a:ln w="12700">
+            <a:solidFill>
+              <a:srgbClr val="B4C7D2"/>
+            </a:solidFill>
+          </a:ln>
+          <a:effectLst/>
+        </p:spPr>
+      </p:cxnSp>
+      <p:cxnSp>
+        <p:nvCxnSpPr>
+          <p:cNvPr id="21" name="C2-E05 line 19" descr="sci-ppt:o019"/>
+          <p:cNvCxnSpPr/>
+          <p:nvPr/>
+        </p:nvCxnSpPr>
+        <p:spPr>
+          <a:xfrm>
+            <a:off x="5577840" y="1371600"/>
+            <a:ext cx="0" cy="3657600"/>
+          </a:xfrm>
+          <a:prstGeom prst="line">
+            <a:avLst/>
+          </a:prstGeom>
+          <a:ln w="7620">
+            <a:solidFill>
+              <a:srgbClr val="2E4756"/>
+            </a:solidFill>
+          </a:ln>
+          <a:effectLst/>
+        </p:spPr>
+      </p:cxnSp>
+      <p:sp>
+        <p:nvSpPr>
+          <p:cNvPr id="22" name="C2-E05 text 20" descr="sci-ppt:o020"/>
           <p:cNvSpPr txBox="1"/>
           <p:nvPr/>
         </p:nvSpPr>
         <p:spPr>
           <a:xfrm>
-            <a:off x="365760" y="4974336"/>
-            <a:ext cx="5547360" cy="321259"/>
+            <a:off x="5120640" y="5111496"/>
+            <a:ext cx="914400" cy="208407"/>
           </a:xfrm>
           <a:prstGeom prst="rect">
             <a:avLst/>
@@ -3482,7 +3750,781 @@
           <a:effectLst/>
         </p:spPr>
         <p:txBody>
-          <a:bodyPr wrap="none" lIns="27432" rIns="27432" tIns="18288" bIns="18288" anchor="ctr">
+          <a:bodyPr wrap="none" lIns="18288" rIns="18288" tIns="18288" bIns="18288" anchor="t">
+            <a:spAutoFit/>
+          </a:bodyPr>
+          <a:lstStyle/>
+          <a:p>
+            <a:pPr algn="ctr">
+              <a:spcAft>
+                <a:spcPts val="0"/>
+              </a:spcAft>
+            </a:pPr>
+            <a:r>
+              <a:rPr sz="1050" b="0" i="0">
+                <a:solidFill>
+                  <a:srgbClr val="B4C7D2"/>
+                </a:solidFill>
+                <a:latin typeface="Arial"/>
+              </a:rPr>
+              <a:t>0</a:t>
+            </a:r>
+          </a:p>
+        </p:txBody>
+      </p:sp>
+      <p:cxnSp>
+        <p:nvCxnSpPr>
+          <p:cNvPr id="23" name="C2-E05 line 21" descr="sci-ppt:o021"/>
+          <p:cNvCxnSpPr/>
+          <p:nvPr/>
+        </p:nvCxnSpPr>
+        <p:spPr>
+          <a:xfrm>
+            <a:off x="7086600" y="5029200"/>
+            <a:ext cx="0" cy="64008"/>
+          </a:xfrm>
+          <a:prstGeom prst="line">
+            <a:avLst/>
+          </a:prstGeom>
+          <a:ln w="12700">
+            <a:solidFill>
+              <a:srgbClr val="B4C7D2"/>
+            </a:solidFill>
+          </a:ln>
+          <a:effectLst/>
+        </p:spPr>
+      </p:cxnSp>
+      <p:cxnSp>
+        <p:nvCxnSpPr>
+          <p:cNvPr id="24" name="C2-E05 line 22" descr="sci-ppt:o022"/>
+          <p:cNvCxnSpPr/>
+          <p:nvPr/>
+        </p:nvCxnSpPr>
+        <p:spPr>
+          <a:xfrm>
+            <a:off x="7086600" y="1371600"/>
+            <a:ext cx="0" cy="3657600"/>
+          </a:xfrm>
+          <a:prstGeom prst="line">
+            <a:avLst/>
+          </a:prstGeom>
+          <a:ln w="7620">
+            <a:solidFill>
+              <a:srgbClr val="2E4756"/>
+            </a:solidFill>
+          </a:ln>
+          <a:effectLst/>
+        </p:spPr>
+      </p:cxnSp>
+      <p:sp>
+        <p:nvSpPr>
+          <p:cNvPr id="25" name="C2-E05 text 23" descr="sci-ppt:o023"/>
+          <p:cNvSpPr txBox="1"/>
+          <p:nvPr/>
+        </p:nvSpPr>
+        <p:spPr>
+          <a:xfrm>
+            <a:off x="6629400" y="5111496"/>
+            <a:ext cx="914400" cy="208407"/>
+          </a:xfrm>
+          <a:prstGeom prst="rect">
+            <a:avLst/>
+          </a:prstGeom>
+          <a:noFill/>
+          <a:effectLst/>
+        </p:spPr>
+        <p:txBody>
+          <a:bodyPr wrap="none" lIns="18288" rIns="18288" tIns="18288" bIns="18288" anchor="t">
+            <a:spAutoFit/>
+          </a:bodyPr>
+          <a:lstStyle/>
+          <a:p>
+            <a:pPr algn="ctr">
+              <a:spcAft>
+                <a:spcPts val="0"/>
+              </a:spcAft>
+            </a:pPr>
+            <a:r>
+              <a:rPr sz="1050" b="0" i="0">
+                <a:solidFill>
+                  <a:srgbClr val="B4C7D2"/>
+                </a:solidFill>
+                <a:latin typeface="Arial"/>
+              </a:rPr>
+              <a:t>5</a:t>
+            </a:r>
+          </a:p>
+        </p:txBody>
+      </p:sp>
+      <p:cxnSp>
+        <p:nvCxnSpPr>
+          <p:cNvPr id="26" name="C2-E05 line 24" descr="sci-ppt:o024"/>
+          <p:cNvCxnSpPr/>
+          <p:nvPr/>
+        </p:nvCxnSpPr>
+        <p:spPr>
+          <a:xfrm>
+            <a:off x="8595359" y="5029200"/>
+            <a:ext cx="0" cy="64008"/>
+          </a:xfrm>
+          <a:prstGeom prst="line">
+            <a:avLst/>
+          </a:prstGeom>
+          <a:ln w="12700">
+            <a:solidFill>
+              <a:srgbClr val="B4C7D2"/>
+            </a:solidFill>
+          </a:ln>
+          <a:effectLst/>
+        </p:spPr>
+      </p:cxnSp>
+      <p:cxnSp>
+        <p:nvCxnSpPr>
+          <p:cNvPr id="27" name="C2-E05 line 25" descr="sci-ppt:o025"/>
+          <p:cNvCxnSpPr/>
+          <p:nvPr/>
+        </p:nvCxnSpPr>
+        <p:spPr>
+          <a:xfrm>
+            <a:off x="8595359" y="1371600"/>
+            <a:ext cx="0" cy="3657600"/>
+          </a:xfrm>
+          <a:prstGeom prst="line">
+            <a:avLst/>
+          </a:prstGeom>
+          <a:ln w="7620">
+            <a:solidFill>
+              <a:srgbClr val="2E4756"/>
+            </a:solidFill>
+          </a:ln>
+          <a:effectLst/>
+        </p:spPr>
+      </p:cxnSp>
+      <p:sp>
+        <p:nvSpPr>
+          <p:cNvPr id="28" name="C2-E05 text 26" descr="sci-ppt:o026"/>
+          <p:cNvSpPr txBox="1"/>
+          <p:nvPr/>
+        </p:nvSpPr>
+        <p:spPr>
+          <a:xfrm>
+            <a:off x="8138159" y="5111496"/>
+            <a:ext cx="914400" cy="208407"/>
+          </a:xfrm>
+          <a:prstGeom prst="rect">
+            <a:avLst/>
+          </a:prstGeom>
+          <a:noFill/>
+          <a:effectLst/>
+        </p:spPr>
+        <p:txBody>
+          <a:bodyPr wrap="none" lIns="18288" rIns="18288" tIns="18288" bIns="18288" anchor="t">
+            <a:spAutoFit/>
+          </a:bodyPr>
+          <a:lstStyle/>
+          <a:p>
+            <a:pPr algn="ctr">
+              <a:spcAft>
+                <a:spcPts val="0"/>
+              </a:spcAft>
+            </a:pPr>
+            <a:r>
+              <a:rPr sz="1050" b="0" i="0">
+                <a:solidFill>
+                  <a:srgbClr val="B4C7D2"/>
+                </a:solidFill>
+                <a:latin typeface="Arial"/>
+              </a:rPr>
+              <a:t>10</a:t>
+            </a:r>
+          </a:p>
+        </p:txBody>
+      </p:sp>
+      <p:cxnSp>
+        <p:nvCxnSpPr>
+          <p:cNvPr id="29" name="C2-E05 line 27" descr="sci-ppt:o027"/>
+          <p:cNvCxnSpPr/>
+          <p:nvPr/>
+        </p:nvCxnSpPr>
+        <p:spPr>
+          <a:xfrm>
+            <a:off x="10104119" y="5029200"/>
+            <a:ext cx="0" cy="64008"/>
+          </a:xfrm>
+          <a:prstGeom prst="line">
+            <a:avLst/>
+          </a:prstGeom>
+          <a:ln w="12700">
+            <a:solidFill>
+              <a:srgbClr val="B4C7D2"/>
+            </a:solidFill>
+          </a:ln>
+          <a:effectLst/>
+        </p:spPr>
+      </p:cxnSp>
+      <p:cxnSp>
+        <p:nvCxnSpPr>
+          <p:cNvPr id="30" name="C2-E05 line 28" descr="sci-ppt:o028"/>
+          <p:cNvCxnSpPr/>
+          <p:nvPr/>
+        </p:nvCxnSpPr>
+        <p:spPr>
+          <a:xfrm>
+            <a:off x="10104119" y="1371600"/>
+            <a:ext cx="0" cy="3657600"/>
+          </a:xfrm>
+          <a:prstGeom prst="line">
+            <a:avLst/>
+          </a:prstGeom>
+          <a:ln w="7620">
+            <a:solidFill>
+              <a:srgbClr val="2E4756"/>
+            </a:solidFill>
+          </a:ln>
+          <a:effectLst/>
+        </p:spPr>
+      </p:cxnSp>
+      <p:sp>
+        <p:nvSpPr>
+          <p:cNvPr id="31" name="C2-E05 text 29" descr="sci-ppt:o029"/>
+          <p:cNvSpPr txBox="1"/>
+          <p:nvPr/>
+        </p:nvSpPr>
+        <p:spPr>
+          <a:xfrm>
+            <a:off x="9646919" y="5111496"/>
+            <a:ext cx="914400" cy="208407"/>
+          </a:xfrm>
+          <a:prstGeom prst="rect">
+            <a:avLst/>
+          </a:prstGeom>
+          <a:noFill/>
+          <a:effectLst/>
+        </p:spPr>
+        <p:txBody>
+          <a:bodyPr wrap="none" lIns="18288" rIns="18288" tIns="18288" bIns="18288" anchor="t">
+            <a:spAutoFit/>
+          </a:bodyPr>
+          <a:lstStyle/>
+          <a:p>
+            <a:pPr algn="ctr">
+              <a:spcAft>
+                <a:spcPts val="0"/>
+              </a:spcAft>
+            </a:pPr>
+            <a:r>
+              <a:rPr sz="1050" b="0" i="0">
+                <a:solidFill>
+                  <a:srgbClr val="B4C7D2"/>
+                </a:solidFill>
+                <a:latin typeface="Arial"/>
+              </a:rPr>
+              <a:t>15</a:t>
+            </a:r>
+          </a:p>
+        </p:txBody>
+      </p:sp>
+      <p:cxnSp>
+        <p:nvCxnSpPr>
+          <p:cNvPr id="32" name="C2-E05 line 30" descr="sci-ppt:o030"/>
+          <p:cNvCxnSpPr/>
+          <p:nvPr/>
+        </p:nvCxnSpPr>
+        <p:spPr>
+          <a:xfrm>
+            <a:off x="11612880" y="5029200"/>
+            <a:ext cx="0" cy="64008"/>
+          </a:xfrm>
+          <a:prstGeom prst="line">
+            <a:avLst/>
+          </a:prstGeom>
+          <a:ln w="12700">
+            <a:solidFill>
+              <a:srgbClr val="B4C7D2"/>
+            </a:solidFill>
+          </a:ln>
+          <a:effectLst/>
+        </p:spPr>
+      </p:cxnSp>
+      <p:cxnSp>
+        <p:nvCxnSpPr>
+          <p:cNvPr id="33" name="C2-E05 line 31" descr="sci-ppt:o031"/>
+          <p:cNvCxnSpPr/>
+          <p:nvPr/>
+        </p:nvCxnSpPr>
+        <p:spPr>
+          <a:xfrm>
+            <a:off x="11612880" y="1371600"/>
+            <a:ext cx="0" cy="3657600"/>
+          </a:xfrm>
+          <a:prstGeom prst="line">
+            <a:avLst/>
+          </a:prstGeom>
+          <a:ln w="7620">
+            <a:solidFill>
+              <a:srgbClr val="2E4756"/>
+            </a:solidFill>
+          </a:ln>
+          <a:effectLst/>
+        </p:spPr>
+      </p:cxnSp>
+      <p:sp>
+        <p:nvSpPr>
+          <p:cNvPr id="34" name="C2-E05 text 32" descr="sci-ppt:o032"/>
+          <p:cNvSpPr txBox="1"/>
+          <p:nvPr/>
+        </p:nvSpPr>
+        <p:spPr>
+          <a:xfrm>
+            <a:off x="11155680" y="5111496"/>
+            <a:ext cx="914400" cy="208407"/>
+          </a:xfrm>
+          <a:prstGeom prst="rect">
+            <a:avLst/>
+          </a:prstGeom>
+          <a:noFill/>
+          <a:effectLst/>
+        </p:spPr>
+        <p:txBody>
+          <a:bodyPr wrap="none" lIns="18288" rIns="18288" tIns="18288" bIns="18288" anchor="t">
+            <a:spAutoFit/>
+          </a:bodyPr>
+          <a:lstStyle/>
+          <a:p>
+            <a:pPr algn="ctr">
+              <a:spcAft>
+                <a:spcPts val="0"/>
+              </a:spcAft>
+            </a:pPr>
+            <a:r>
+              <a:rPr sz="1050" b="0" i="0">
+                <a:solidFill>
+                  <a:srgbClr val="B4C7D2"/>
+                </a:solidFill>
+                <a:latin typeface="Arial"/>
+              </a:rPr>
+              <a:t>20</a:t>
+            </a:r>
+          </a:p>
+        </p:txBody>
+      </p:sp>
+      <p:cxnSp>
+        <p:nvCxnSpPr>
+          <p:cNvPr id="35" name="C2-E05 line 33" descr="sci-ppt:o033"/>
+          <p:cNvCxnSpPr/>
+          <p:nvPr/>
+        </p:nvCxnSpPr>
+        <p:spPr>
+          <a:xfrm>
+            <a:off x="5513831" y="5029200"/>
+            <a:ext cx="64009" cy="0"/>
+          </a:xfrm>
+          <a:prstGeom prst="line">
+            <a:avLst/>
+          </a:prstGeom>
+          <a:ln w="12700">
+            <a:solidFill>
+              <a:srgbClr val="B4C7D2"/>
+            </a:solidFill>
+          </a:ln>
+          <a:effectLst/>
+        </p:spPr>
+      </p:cxnSp>
+      <p:cxnSp>
+        <p:nvCxnSpPr>
+          <p:cNvPr id="36" name="C2-E05 line 34" descr="sci-ppt:o034"/>
+          <p:cNvCxnSpPr/>
+          <p:nvPr/>
+        </p:nvCxnSpPr>
+        <p:spPr>
+          <a:xfrm>
+            <a:off x="5513831" y="4158342"/>
+            <a:ext cx="64009" cy="0"/>
+          </a:xfrm>
+          <a:prstGeom prst="line">
+            <a:avLst/>
+          </a:prstGeom>
+          <a:ln w="12700">
+            <a:solidFill>
+              <a:srgbClr val="B4C7D2"/>
+            </a:solidFill>
+          </a:ln>
+          <a:effectLst/>
+        </p:spPr>
+      </p:cxnSp>
+      <p:cxnSp>
+        <p:nvCxnSpPr>
+          <p:cNvPr id="37" name="C2-E05 line 35" descr="sci-ppt:o035"/>
+          <p:cNvCxnSpPr/>
+          <p:nvPr/>
+        </p:nvCxnSpPr>
+        <p:spPr>
+          <a:xfrm>
+            <a:off x="5577840" y="4158342"/>
+            <a:ext cx="6035040" cy="0"/>
+          </a:xfrm>
+          <a:prstGeom prst="line">
+            <a:avLst/>
+          </a:prstGeom>
+          <a:ln w="7620">
+            <a:solidFill>
+              <a:srgbClr val="2E4756"/>
+            </a:solidFill>
+          </a:ln>
+          <a:effectLst/>
+        </p:spPr>
+      </p:cxnSp>
+      <p:sp>
+        <p:nvSpPr>
+          <p:cNvPr id="38" name="C2-E05 text 36" descr="sci-ppt:o036"/>
+          <p:cNvSpPr txBox="1"/>
+          <p:nvPr/>
+        </p:nvSpPr>
+        <p:spPr>
+          <a:xfrm>
+            <a:off x="4709159" y="4076046"/>
+            <a:ext cx="777240" cy="208407"/>
+          </a:xfrm>
+          <a:prstGeom prst="rect">
+            <a:avLst/>
+          </a:prstGeom>
+          <a:noFill/>
+          <a:effectLst/>
+        </p:spPr>
+        <p:txBody>
+          <a:bodyPr wrap="none" lIns="18288" rIns="18288" tIns="18288" bIns="18288" anchor="t">
+            <a:spAutoFit/>
+          </a:bodyPr>
+          <a:lstStyle/>
+          <a:p>
+            <a:pPr algn="r">
+              <a:spcAft>
+                <a:spcPts val="0"/>
+              </a:spcAft>
+            </a:pPr>
+            <a:r>
+              <a:rPr sz="1050" b="0" i="0">
+                <a:solidFill>
+                  <a:srgbClr val="B4C7D2"/>
+                </a:solidFill>
+                <a:latin typeface="Arial"/>
+              </a:rPr>
+              <a:t>0.25</a:t>
+            </a:r>
+          </a:p>
+        </p:txBody>
+      </p:sp>
+      <p:cxnSp>
+        <p:nvCxnSpPr>
+          <p:cNvPr id="39" name="C2-E05 line 37" descr="sci-ppt:o037"/>
+          <p:cNvCxnSpPr/>
+          <p:nvPr/>
+        </p:nvCxnSpPr>
+        <p:spPr>
+          <a:xfrm>
+            <a:off x="5513831" y="3287485"/>
+            <a:ext cx="64009" cy="0"/>
+          </a:xfrm>
+          <a:prstGeom prst="line">
+            <a:avLst/>
+          </a:prstGeom>
+          <a:ln w="12700">
+            <a:solidFill>
+              <a:srgbClr val="B4C7D2"/>
+            </a:solidFill>
+          </a:ln>
+          <a:effectLst/>
+        </p:spPr>
+      </p:cxnSp>
+      <p:cxnSp>
+        <p:nvCxnSpPr>
+          <p:cNvPr id="40" name="C2-E05 line 38" descr="sci-ppt:o038"/>
+          <p:cNvCxnSpPr/>
+          <p:nvPr/>
+        </p:nvCxnSpPr>
+        <p:spPr>
+          <a:xfrm>
+            <a:off x="5577840" y="3287485"/>
+            <a:ext cx="6035040" cy="0"/>
+          </a:xfrm>
+          <a:prstGeom prst="line">
+            <a:avLst/>
+          </a:prstGeom>
+          <a:ln w="7620">
+            <a:solidFill>
+              <a:srgbClr val="2E4756"/>
+            </a:solidFill>
+          </a:ln>
+          <a:effectLst/>
+        </p:spPr>
+      </p:cxnSp>
+      <p:sp>
+        <p:nvSpPr>
+          <p:cNvPr id="41" name="C2-E05 text 39" descr="sci-ppt:o039"/>
+          <p:cNvSpPr txBox="1"/>
+          <p:nvPr/>
+        </p:nvSpPr>
+        <p:spPr>
+          <a:xfrm>
+            <a:off x="4709159" y="3205189"/>
+            <a:ext cx="777240" cy="208407"/>
+          </a:xfrm>
+          <a:prstGeom prst="rect">
+            <a:avLst/>
+          </a:prstGeom>
+          <a:noFill/>
+          <a:effectLst/>
+        </p:spPr>
+        <p:txBody>
+          <a:bodyPr wrap="none" lIns="18288" rIns="18288" tIns="18288" bIns="18288" anchor="t">
+            <a:spAutoFit/>
+          </a:bodyPr>
+          <a:lstStyle/>
+          <a:p>
+            <a:pPr algn="r">
+              <a:spcAft>
+                <a:spcPts val="0"/>
+              </a:spcAft>
+            </a:pPr>
+            <a:r>
+              <a:rPr sz="1050" b="0" i="0">
+                <a:solidFill>
+                  <a:srgbClr val="B4C7D2"/>
+                </a:solidFill>
+                <a:latin typeface="Arial"/>
+              </a:rPr>
+              <a:t>0.50</a:t>
+            </a:r>
+          </a:p>
+        </p:txBody>
+      </p:sp>
+      <p:cxnSp>
+        <p:nvCxnSpPr>
+          <p:cNvPr id="42" name="C2-E05 line 40" descr="sci-ppt:o040"/>
+          <p:cNvCxnSpPr/>
+          <p:nvPr/>
+        </p:nvCxnSpPr>
+        <p:spPr>
+          <a:xfrm>
+            <a:off x="5513831" y="2416628"/>
+            <a:ext cx="64009" cy="0"/>
+          </a:xfrm>
+          <a:prstGeom prst="line">
+            <a:avLst/>
+          </a:prstGeom>
+          <a:ln w="12700">
+            <a:solidFill>
+              <a:srgbClr val="B4C7D2"/>
+            </a:solidFill>
+          </a:ln>
+          <a:effectLst/>
+        </p:spPr>
+      </p:cxnSp>
+      <p:cxnSp>
+        <p:nvCxnSpPr>
+          <p:cNvPr id="43" name="C2-E05 line 41" descr="sci-ppt:o041"/>
+          <p:cNvCxnSpPr/>
+          <p:nvPr/>
+        </p:nvCxnSpPr>
+        <p:spPr>
+          <a:xfrm>
+            <a:off x="5577840" y="2416628"/>
+            <a:ext cx="6035040" cy="0"/>
+          </a:xfrm>
+          <a:prstGeom prst="line">
+            <a:avLst/>
+          </a:prstGeom>
+          <a:ln w="7620">
+            <a:solidFill>
+              <a:srgbClr val="2E4756"/>
+            </a:solidFill>
+          </a:ln>
+          <a:effectLst/>
+        </p:spPr>
+      </p:cxnSp>
+      <p:sp>
+        <p:nvSpPr>
+          <p:cNvPr id="44" name="C2-E05 text 42" descr="sci-ppt:o042"/>
+          <p:cNvSpPr txBox="1"/>
+          <p:nvPr/>
+        </p:nvSpPr>
+        <p:spPr>
+          <a:xfrm>
+            <a:off x="4709159" y="2334332"/>
+            <a:ext cx="777240" cy="208407"/>
+          </a:xfrm>
+          <a:prstGeom prst="rect">
+            <a:avLst/>
+          </a:prstGeom>
+          <a:noFill/>
+          <a:effectLst/>
+        </p:spPr>
+        <p:txBody>
+          <a:bodyPr wrap="none" lIns="18288" rIns="18288" tIns="18288" bIns="18288" anchor="t">
+            <a:spAutoFit/>
+          </a:bodyPr>
+          <a:lstStyle/>
+          <a:p>
+            <a:pPr algn="r">
+              <a:spcAft>
+                <a:spcPts val="0"/>
+              </a:spcAft>
+            </a:pPr>
+            <a:r>
+              <a:rPr sz="1050" b="0" i="0">
+                <a:solidFill>
+                  <a:srgbClr val="B4C7D2"/>
+                </a:solidFill>
+                <a:latin typeface="Arial"/>
+              </a:rPr>
+              <a:t>0.75</a:t>
+            </a:r>
+          </a:p>
+        </p:txBody>
+      </p:sp>
+      <p:cxnSp>
+        <p:nvCxnSpPr>
+          <p:cNvPr id="45" name="C2-E05 line 43" descr="sci-ppt:o043"/>
+          <p:cNvCxnSpPr/>
+          <p:nvPr/>
+        </p:nvCxnSpPr>
+        <p:spPr>
+          <a:xfrm>
+            <a:off x="5513831" y="1545771"/>
+            <a:ext cx="64009" cy="0"/>
+          </a:xfrm>
+          <a:prstGeom prst="line">
+            <a:avLst/>
+          </a:prstGeom>
+          <a:ln w="12700">
+            <a:solidFill>
+              <a:srgbClr val="B4C7D2"/>
+            </a:solidFill>
+          </a:ln>
+          <a:effectLst/>
+        </p:spPr>
+      </p:cxnSp>
+      <p:cxnSp>
+        <p:nvCxnSpPr>
+          <p:cNvPr id="46" name="C2-E05 line 44" descr="sci-ppt:o044"/>
+          <p:cNvCxnSpPr/>
+          <p:nvPr/>
+        </p:nvCxnSpPr>
+        <p:spPr>
+          <a:xfrm>
+            <a:off x="5577840" y="1545771"/>
+            <a:ext cx="6035040" cy="0"/>
+          </a:xfrm>
+          <a:prstGeom prst="line">
+            <a:avLst/>
+          </a:prstGeom>
+          <a:ln w="7620">
+            <a:solidFill>
+              <a:srgbClr val="2E4756"/>
+            </a:solidFill>
+          </a:ln>
+          <a:effectLst/>
+        </p:spPr>
+      </p:cxnSp>
+      <p:sp>
+        <p:nvSpPr>
+          <p:cNvPr id="47" name="C2-E05 text 45" descr="sci-ppt:o045"/>
+          <p:cNvSpPr txBox="1"/>
+          <p:nvPr/>
+        </p:nvSpPr>
+        <p:spPr>
+          <a:xfrm>
+            <a:off x="4709159" y="1463475"/>
+            <a:ext cx="777240" cy="208407"/>
+          </a:xfrm>
+          <a:prstGeom prst="rect">
+            <a:avLst/>
+          </a:prstGeom>
+          <a:noFill/>
+          <a:effectLst/>
+        </p:spPr>
+        <p:txBody>
+          <a:bodyPr wrap="none" lIns="18288" rIns="18288" tIns="18288" bIns="18288" anchor="t">
+            <a:spAutoFit/>
+          </a:bodyPr>
+          <a:lstStyle/>
+          <a:p>
+            <a:pPr algn="r">
+              <a:spcAft>
+                <a:spcPts val="0"/>
+              </a:spcAft>
+            </a:pPr>
+            <a:r>
+              <a:rPr sz="1050" b="0" i="0">
+                <a:solidFill>
+                  <a:srgbClr val="B4C7D2"/>
+                </a:solidFill>
+                <a:latin typeface="Arial"/>
+              </a:rPr>
+              <a:t>1.00</a:t>
+            </a:r>
+          </a:p>
+        </p:txBody>
+      </p:sp>
+      <p:sp>
+        <p:nvSpPr>
+          <p:cNvPr id="48" name="C2-E05 text 46" descr="sci-ppt:o046"/>
+          <p:cNvSpPr txBox="1"/>
+          <p:nvPr/>
+        </p:nvSpPr>
+        <p:spPr>
+          <a:xfrm>
+            <a:off x="5577840" y="5312664"/>
+            <a:ext cx="6035040" cy="231648"/>
+          </a:xfrm>
+          <a:prstGeom prst="rect">
+            <a:avLst/>
+          </a:prstGeom>
+          <a:noFill/>
+          <a:effectLst/>
+        </p:spPr>
+        <p:txBody>
+          <a:bodyPr wrap="none" lIns="18288" rIns="18288" tIns="18288" bIns="18288" anchor="t">
+            <a:spAutoFit/>
+          </a:bodyPr>
+          <a:lstStyle/>
+          <a:p>
+            <a:pPr algn="ctr">
+              <a:spcAft>
+                <a:spcPts val="0"/>
+              </a:spcAft>
+            </a:pPr>
+            <a:r>
+              <a:rPr sz="1200" b="0" i="0">
+                <a:solidFill>
+                  <a:srgbClr val="E7F0F3"/>
+                </a:solidFill>
+                <a:latin typeface="Arial"/>
+              </a:rPr>
+              <a:t>depth z  (µm)</a:t>
+            </a:r>
+          </a:p>
+        </p:txBody>
+      </p:sp>
+      <p:sp>
+        <p:nvSpPr>
+          <p:cNvPr id="49" name="C2-E05 text 47" descr="sci-ppt:o047"/>
+          <p:cNvSpPr txBox="1"/>
+          <p:nvPr/>
+        </p:nvSpPr>
+        <p:spPr>
+          <a:xfrm>
+            <a:off x="5029200" y="1024128"/>
+            <a:ext cx="6035040" cy="231648"/>
+          </a:xfrm>
+          <a:prstGeom prst="rect">
+            <a:avLst/>
+          </a:prstGeom>
+          <a:noFill/>
+          <a:effectLst/>
+        </p:spPr>
+        <p:txBody>
+          <a:bodyPr wrap="none" lIns="18288" rIns="18288" tIns="18288" bIns="18288" anchor="t">
             <a:spAutoFit/>
           </a:bodyPr>
           <a:lstStyle/>
@@ -3493,27 +4535,2418 @@
               </a:spcAft>
             </a:pPr>
             <a:r>
-              <a:rPr sz="1632" b="0" i="0">
+              <a:rPr sz="1200" b="0" i="0">
                 <a:solidFill>
                   <a:srgbClr val="E7F0F3"/>
                 </a:solidFill>
                 <a:latin typeface="Arial"/>
               </a:rPr>
-              <a:t>z: propagation depth</a:t>
-            </a:r>
-          </a:p>
-        </p:txBody>
-      </p:sp>
-      <p:sp>
-        <p:nvSpPr>
-          <p:cNvPr id="14" name="text13" descr="sci-ppt:C2-E05-013"/>
+              <a:t>I(z) / Iᵢₙ</a:t>
+            </a:r>
+          </a:p>
+        </p:txBody>
+      </p:sp>
+      <p:sp>
+        <p:nvSpPr>
+          <p:cNvPr id="50" name="C2-E05 polygon 48" descr="sci-ppt:o048"/>
+          <p:cNvSpPr/>
+          <p:nvPr/>
+        </p:nvSpPr>
+        <p:spPr>
+          <a:xfrm>
+            <a:off x="5577840" y="1545771"/>
+            <a:ext cx="6035040" cy="3419627"/>
+          </a:xfrm>
+          <a:custGeom>
+            <a:avLst/>
+            <a:gdLst/>
+            <a:ahLst/>
+            <a:cxnLst/>
+            <a:rect l="l" t="t" r="r" b="b"/>
+            <a:pathLst>
+              <a:path w="6035040" h="3419627">
+                <a:moveTo>
+                  <a:pt x="0" y="0"/>
+                </a:moveTo>
+                <a:lnTo>
+                  <a:pt x="40368" y="91966"/>
+                </a:lnTo>
+                <a:lnTo>
+                  <a:pt x="80736" y="181505"/>
+                </a:lnTo>
+                <a:lnTo>
+                  <a:pt x="121104" y="268679"/>
+                </a:lnTo>
+                <a:lnTo>
+                  <a:pt x="161472" y="353552"/>
+                </a:lnTo>
+                <a:lnTo>
+                  <a:pt x="201840" y="436184"/>
+                </a:lnTo>
+                <a:lnTo>
+                  <a:pt x="242208" y="516634"/>
+                </a:lnTo>
+                <a:lnTo>
+                  <a:pt x="282577" y="594961"/>
+                </a:lnTo>
+                <a:lnTo>
+                  <a:pt x="322945" y="671220"/>
+                </a:lnTo>
+                <a:lnTo>
+                  <a:pt x="363313" y="745465"/>
+                </a:lnTo>
+                <a:lnTo>
+                  <a:pt x="403681" y="817750"/>
+                </a:lnTo>
+                <a:lnTo>
+                  <a:pt x="444049" y="888127"/>
+                </a:lnTo>
+                <a:lnTo>
+                  <a:pt x="484417" y="956646"/>
+                </a:lnTo>
+                <a:lnTo>
+                  <a:pt x="524786" y="1023356"/>
+                </a:lnTo>
+                <a:lnTo>
+                  <a:pt x="565154" y="1088304"/>
+                </a:lnTo>
+                <a:lnTo>
+                  <a:pt x="605522" y="1151538"/>
+                </a:lnTo>
+                <a:lnTo>
+                  <a:pt x="645890" y="1213103"/>
+                </a:lnTo>
+                <a:lnTo>
+                  <a:pt x="686258" y="1273042"/>
+                </a:lnTo>
+                <a:lnTo>
+                  <a:pt x="726626" y="1331398"/>
+                </a:lnTo>
+                <a:lnTo>
+                  <a:pt x="766995" y="1388214"/>
+                </a:lnTo>
+                <a:lnTo>
+                  <a:pt x="807363" y="1443530"/>
+                </a:lnTo>
+                <a:lnTo>
+                  <a:pt x="847731" y="1497386"/>
+                </a:lnTo>
+                <a:lnTo>
+                  <a:pt x="888099" y="1549819"/>
+                </a:lnTo>
+                <a:lnTo>
+                  <a:pt x="928467" y="1600869"/>
+                </a:lnTo>
+                <a:lnTo>
+                  <a:pt x="968835" y="1650570"/>
+                </a:lnTo>
+                <a:lnTo>
+                  <a:pt x="1009204" y="1698960"/>
+                </a:lnTo>
+                <a:lnTo>
+                  <a:pt x="1049572" y="1746072"/>
+                </a:lnTo>
+                <a:lnTo>
+                  <a:pt x="1089940" y="1791940"/>
+                </a:lnTo>
+                <a:lnTo>
+                  <a:pt x="1130308" y="1836597"/>
+                </a:lnTo>
+                <a:lnTo>
+                  <a:pt x="1170676" y="1880075"/>
+                </a:lnTo>
+                <a:lnTo>
+                  <a:pt x="1211044" y="1922405"/>
+                </a:lnTo>
+                <a:lnTo>
+                  <a:pt x="1251412" y="1963618"/>
+                </a:lnTo>
+                <a:lnTo>
+                  <a:pt x="1291781" y="2003743"/>
+                </a:lnTo>
+                <a:lnTo>
+                  <a:pt x="1332149" y="2042808"/>
+                </a:lnTo>
+                <a:lnTo>
+                  <a:pt x="1372517" y="2080842"/>
+                </a:lnTo>
+                <a:lnTo>
+                  <a:pt x="1412885" y="2117872"/>
+                </a:lnTo>
+                <a:lnTo>
+                  <a:pt x="1453253" y="2153924"/>
+                </a:lnTo>
+                <a:lnTo>
+                  <a:pt x="1493621" y="2189024"/>
+                </a:lnTo>
+                <a:lnTo>
+                  <a:pt x="1533990" y="2223198"/>
+                </a:lnTo>
+                <a:lnTo>
+                  <a:pt x="1574358" y="2256469"/>
+                </a:lnTo>
+                <a:lnTo>
+                  <a:pt x="1614726" y="2288863"/>
+                </a:lnTo>
+                <a:lnTo>
+                  <a:pt x="1655094" y="2320400"/>
+                </a:lnTo>
+                <a:lnTo>
+                  <a:pt x="1695462" y="2351106"/>
+                </a:lnTo>
+                <a:lnTo>
+                  <a:pt x="1735830" y="2381000"/>
+                </a:lnTo>
+                <a:lnTo>
+                  <a:pt x="1776199" y="2410105"/>
+                </a:lnTo>
+                <a:lnTo>
+                  <a:pt x="1816567" y="2438442"/>
+                </a:lnTo>
+                <a:lnTo>
+                  <a:pt x="1856935" y="2466031"/>
+                </a:lnTo>
+                <a:lnTo>
+                  <a:pt x="1897303" y="2492891"/>
+                </a:lnTo>
+                <a:lnTo>
+                  <a:pt x="1937671" y="2519043"/>
+                </a:lnTo>
+                <a:lnTo>
+                  <a:pt x="1978039" y="2544504"/>
+                </a:lnTo>
+                <a:lnTo>
+                  <a:pt x="2018408" y="2569292"/>
+                </a:lnTo>
+                <a:lnTo>
+                  <a:pt x="2058776" y="2593426"/>
+                </a:lnTo>
+                <a:lnTo>
+                  <a:pt x="2099144" y="2616923"/>
+                </a:lnTo>
+                <a:lnTo>
+                  <a:pt x="2139512" y="2639800"/>
+                </a:lnTo>
+                <a:lnTo>
+                  <a:pt x="2179880" y="2662073"/>
+                </a:lnTo>
+                <a:lnTo>
+                  <a:pt x="2220248" y="2683757"/>
+                </a:lnTo>
+                <a:lnTo>
+                  <a:pt x="2260616" y="2704870"/>
+                </a:lnTo>
+                <a:lnTo>
+                  <a:pt x="2300985" y="2725424"/>
+                </a:lnTo>
+                <a:lnTo>
+                  <a:pt x="2341353" y="2745437"/>
+                </a:lnTo>
+                <a:lnTo>
+                  <a:pt x="2381721" y="2764920"/>
+                </a:lnTo>
+                <a:lnTo>
+                  <a:pt x="2422089" y="2783890"/>
+                </a:lnTo>
+                <a:lnTo>
+                  <a:pt x="2462457" y="2802358"/>
+                </a:lnTo>
+                <a:lnTo>
+                  <a:pt x="2502825" y="2820339"/>
+                </a:lnTo>
+                <a:lnTo>
+                  <a:pt x="2543194" y="2837846"/>
+                </a:lnTo>
+                <a:lnTo>
+                  <a:pt x="2583562" y="2854890"/>
+                </a:lnTo>
+                <a:lnTo>
+                  <a:pt x="2623930" y="2871484"/>
+                </a:lnTo>
+                <a:lnTo>
+                  <a:pt x="2664298" y="2887640"/>
+                </a:lnTo>
+                <a:lnTo>
+                  <a:pt x="2704666" y="2903369"/>
+                </a:lnTo>
+                <a:lnTo>
+                  <a:pt x="2745034" y="2918683"/>
+                </a:lnTo>
+                <a:lnTo>
+                  <a:pt x="2785403" y="2933593"/>
+                </a:lnTo>
+                <a:lnTo>
+                  <a:pt x="2825771" y="2948110"/>
+                </a:lnTo>
+                <a:lnTo>
+                  <a:pt x="2866139" y="2962243"/>
+                </a:lnTo>
+                <a:lnTo>
+                  <a:pt x="2906507" y="2976002"/>
+                </a:lnTo>
+                <a:lnTo>
+                  <a:pt x="2946875" y="2989399"/>
+                </a:lnTo>
+                <a:lnTo>
+                  <a:pt x="2987243" y="3002442"/>
+                </a:lnTo>
+                <a:lnTo>
+                  <a:pt x="3027612" y="3015141"/>
+                </a:lnTo>
+                <a:lnTo>
+                  <a:pt x="3067980" y="3027504"/>
+                </a:lnTo>
+                <a:lnTo>
+                  <a:pt x="3108348" y="3039541"/>
+                </a:lnTo>
+                <a:lnTo>
+                  <a:pt x="3148716" y="3051260"/>
+                </a:lnTo>
+                <a:lnTo>
+                  <a:pt x="3189084" y="3062670"/>
+                </a:lnTo>
+                <a:lnTo>
+                  <a:pt x="3229452" y="3073778"/>
+                </a:lnTo>
+                <a:lnTo>
+                  <a:pt x="3269821" y="3084593"/>
+                </a:lnTo>
+                <a:lnTo>
+                  <a:pt x="3310189" y="3095123"/>
+                </a:lnTo>
+                <a:lnTo>
+                  <a:pt x="3350557" y="3105375"/>
+                </a:lnTo>
+                <a:lnTo>
+                  <a:pt x="3390925" y="3115356"/>
+                </a:lnTo>
+                <a:lnTo>
+                  <a:pt x="3431293" y="3125073"/>
+                </a:lnTo>
+                <a:lnTo>
+                  <a:pt x="3471661" y="3134534"/>
+                </a:lnTo>
+                <a:lnTo>
+                  <a:pt x="3512029" y="3143745"/>
+                </a:lnTo>
+                <a:lnTo>
+                  <a:pt x="3552398" y="3152713"/>
+                </a:lnTo>
+                <a:lnTo>
+                  <a:pt x="3592766" y="3161445"/>
+                </a:lnTo>
+                <a:lnTo>
+                  <a:pt x="3633134" y="3169945"/>
+                </a:lnTo>
+                <a:lnTo>
+                  <a:pt x="3673502" y="3178222"/>
+                </a:lnTo>
+                <a:lnTo>
+                  <a:pt x="3713870" y="3186279"/>
+                </a:lnTo>
+                <a:lnTo>
+                  <a:pt x="3754238" y="3194125"/>
+                </a:lnTo>
+                <a:lnTo>
+                  <a:pt x="3794607" y="3201762"/>
+                </a:lnTo>
+                <a:lnTo>
+                  <a:pt x="3834975" y="3209199"/>
+                </a:lnTo>
+                <a:lnTo>
+                  <a:pt x="3875343" y="3216439"/>
+                </a:lnTo>
+                <a:lnTo>
+                  <a:pt x="3915711" y="3223488"/>
+                </a:lnTo>
+                <a:lnTo>
+                  <a:pt x="3956079" y="3230350"/>
+                </a:lnTo>
+                <a:lnTo>
+                  <a:pt x="3996447" y="3237032"/>
+                </a:lnTo>
+                <a:lnTo>
+                  <a:pt x="4036816" y="3243537"/>
+                </a:lnTo>
+                <a:lnTo>
+                  <a:pt x="4077184" y="3249870"/>
+                </a:lnTo>
+                <a:lnTo>
+                  <a:pt x="4117552" y="3256037"/>
+                </a:lnTo>
+                <a:lnTo>
+                  <a:pt x="4157920" y="3262040"/>
+                </a:lnTo>
+                <a:lnTo>
+                  <a:pt x="4198288" y="3267885"/>
+                </a:lnTo>
+                <a:lnTo>
+                  <a:pt x="4238656" y="3273575"/>
+                </a:lnTo>
+                <a:lnTo>
+                  <a:pt x="4279025" y="3279116"/>
+                </a:lnTo>
+                <a:lnTo>
+                  <a:pt x="4319393" y="3284510"/>
+                </a:lnTo>
+                <a:lnTo>
+                  <a:pt x="4359761" y="3289761"/>
+                </a:lnTo>
+                <a:lnTo>
+                  <a:pt x="4400129" y="3294875"/>
+                </a:lnTo>
+                <a:lnTo>
+                  <a:pt x="4440497" y="3299853"/>
+                </a:lnTo>
+                <a:lnTo>
+                  <a:pt x="4480865" y="3304699"/>
+                </a:lnTo>
+                <a:lnTo>
+                  <a:pt x="4521233" y="3309418"/>
+                </a:lnTo>
+                <a:lnTo>
+                  <a:pt x="4561602" y="3314012"/>
+                </a:lnTo>
+                <a:lnTo>
+                  <a:pt x="4601970" y="3318485"/>
+                </a:lnTo>
+                <a:lnTo>
+                  <a:pt x="4642338" y="3322839"/>
+                </a:lnTo>
+                <a:lnTo>
+                  <a:pt x="4682706" y="3327079"/>
+                </a:lnTo>
+                <a:lnTo>
+                  <a:pt x="4723074" y="3331207"/>
+                </a:lnTo>
+                <a:lnTo>
+                  <a:pt x="4763442" y="3335226"/>
+                </a:lnTo>
+                <a:lnTo>
+                  <a:pt x="4803811" y="3339138"/>
+                </a:lnTo>
+                <a:lnTo>
+                  <a:pt x="4844179" y="3342948"/>
+                </a:lnTo>
+                <a:lnTo>
+                  <a:pt x="4884547" y="3346657"/>
+                </a:lnTo>
+                <a:lnTo>
+                  <a:pt x="4924915" y="3350268"/>
+                </a:lnTo>
+                <a:lnTo>
+                  <a:pt x="4965283" y="3353783"/>
+                </a:lnTo>
+                <a:lnTo>
+                  <a:pt x="5005651" y="3357206"/>
+                </a:lnTo>
+                <a:lnTo>
+                  <a:pt x="5046020" y="3360538"/>
+                </a:lnTo>
+                <a:lnTo>
+                  <a:pt x="5086388" y="3363783"/>
+                </a:lnTo>
+                <a:lnTo>
+                  <a:pt x="5126756" y="3366942"/>
+                </a:lnTo>
+                <a:lnTo>
+                  <a:pt x="5167124" y="3370017"/>
+                </a:lnTo>
+                <a:lnTo>
+                  <a:pt x="5207492" y="3373011"/>
+                </a:lnTo>
+                <a:lnTo>
+                  <a:pt x="5247860" y="3375926"/>
+                </a:lnTo>
+                <a:lnTo>
+                  <a:pt x="5288229" y="3378764"/>
+                </a:lnTo>
+                <a:lnTo>
+                  <a:pt x="5328597" y="3381528"/>
+                </a:lnTo>
+                <a:lnTo>
+                  <a:pt x="5368965" y="3384218"/>
+                </a:lnTo>
+                <a:lnTo>
+                  <a:pt x="5409333" y="3386837"/>
+                </a:lnTo>
+                <a:lnTo>
+                  <a:pt x="5449701" y="3389387"/>
+                </a:lnTo>
+                <a:lnTo>
+                  <a:pt x="5490069" y="3391870"/>
+                </a:lnTo>
+                <a:lnTo>
+                  <a:pt x="5530437" y="3394287"/>
+                </a:lnTo>
+                <a:lnTo>
+                  <a:pt x="5570806" y="3396641"/>
+                </a:lnTo>
+                <a:lnTo>
+                  <a:pt x="5611174" y="3398932"/>
+                </a:lnTo>
+                <a:lnTo>
+                  <a:pt x="5651542" y="3401163"/>
+                </a:lnTo>
+                <a:lnTo>
+                  <a:pt x="5691910" y="3403335"/>
+                </a:lnTo>
+                <a:lnTo>
+                  <a:pt x="5732278" y="3405449"/>
+                </a:lnTo>
+                <a:lnTo>
+                  <a:pt x="5772646" y="3407508"/>
+                </a:lnTo>
+                <a:lnTo>
+                  <a:pt x="5813015" y="3409512"/>
+                </a:lnTo>
+                <a:lnTo>
+                  <a:pt x="5853383" y="3411464"/>
+                </a:lnTo>
+                <a:lnTo>
+                  <a:pt x="5893751" y="3413364"/>
+                </a:lnTo>
+                <a:lnTo>
+                  <a:pt x="5934119" y="3415214"/>
+                </a:lnTo>
+                <a:lnTo>
+                  <a:pt x="5974487" y="3417015"/>
+                </a:lnTo>
+                <a:lnTo>
+                  <a:pt x="6014855" y="3418768"/>
+                </a:lnTo>
+                <a:lnTo>
+                  <a:pt x="6035040" y="3419627"/>
+                </a:lnTo>
+              </a:path>
+            </a:pathLst>
+          </a:custGeom>
+          <a:noFill/>
+          <a:ln w="38100">
+            <a:solidFill>
+              <a:srgbClr val="8EDBD4"/>
+            </a:solidFill>
+          </a:ln>
+          <a:effectLst/>
+        </p:spPr>
+        <p:txBody>
+          <a:bodyPr rtlCol="0" anchor="ctr"/>
+          <a:lstStyle/>
+          <a:p>
+            <a:pPr algn="ctr"/>
+          </a:p>
+        </p:txBody>
+      </p:sp>
+      <p:sp>
+        <p:nvSpPr>
+          <p:cNvPr id="51" name="C2-E05 polygon 49" descr="sci-ppt:o049"/>
+          <p:cNvSpPr/>
+          <p:nvPr/>
+        </p:nvSpPr>
+        <p:spPr>
+          <a:xfrm>
+            <a:off x="5577840" y="1545771"/>
+            <a:ext cx="6035040" cy="3483429"/>
+          </a:xfrm>
+          <a:custGeom>
+            <a:avLst/>
+            <a:gdLst/>
+            <a:ahLst/>
+            <a:cxnLst/>
+            <a:rect l="l" t="t" r="r" b="b"/>
+            <a:pathLst>
+              <a:path w="6035040" h="3483429">
+                <a:moveTo>
+                  <a:pt x="0" y="0"/>
+                </a:moveTo>
+                <a:lnTo>
+                  <a:pt x="20184" y="46291"/>
+                </a:lnTo>
+                <a:lnTo>
+                  <a:pt x="40368" y="91966"/>
+                </a:lnTo>
+                <a:lnTo>
+                  <a:pt x="60552" y="137035"/>
+                </a:lnTo>
+                <a:lnTo>
+                  <a:pt x="80736" y="181505"/>
+                </a:lnTo>
+                <a:lnTo>
+                  <a:pt x="100920" y="225383"/>
+                </a:lnTo>
+                <a:lnTo>
+                  <a:pt x="121104" y="268679"/>
+                </a:lnTo>
+                <a:lnTo>
+                  <a:pt x="141288" y="311399"/>
+                </a:lnTo>
+                <a:lnTo>
+                  <a:pt x="161472" y="353552"/>
+                </a:lnTo>
+                <a:lnTo>
+                  <a:pt x="181656" y="395144"/>
+                </a:lnTo>
+                <a:lnTo>
+                  <a:pt x="201840" y="436184"/>
+                </a:lnTo>
+                <a:lnTo>
+                  <a:pt x="222024" y="476678"/>
+                </a:lnTo>
+                <a:lnTo>
+                  <a:pt x="242208" y="516634"/>
+                </a:lnTo>
+                <a:lnTo>
+                  <a:pt x="262393" y="556060"/>
+                </a:lnTo>
+                <a:lnTo>
+                  <a:pt x="282577" y="594961"/>
+                </a:lnTo>
+                <a:lnTo>
+                  <a:pt x="302761" y="633345"/>
+                </a:lnTo>
+                <a:lnTo>
+                  <a:pt x="322945" y="671220"/>
+                </a:lnTo>
+                <a:lnTo>
+                  <a:pt x="343129" y="708591"/>
+                </a:lnTo>
+                <a:lnTo>
+                  <a:pt x="363313" y="745465"/>
+                </a:lnTo>
+                <a:lnTo>
+                  <a:pt x="383497" y="781849"/>
+                </a:lnTo>
+                <a:lnTo>
+                  <a:pt x="403681" y="817750"/>
+                </a:lnTo>
+                <a:lnTo>
+                  <a:pt x="423865" y="853174"/>
+                </a:lnTo>
+                <a:lnTo>
+                  <a:pt x="444049" y="888127"/>
+                </a:lnTo>
+                <a:lnTo>
+                  <a:pt x="464233" y="922616"/>
+                </a:lnTo>
+                <a:lnTo>
+                  <a:pt x="484417" y="956646"/>
+                </a:lnTo>
+                <a:lnTo>
+                  <a:pt x="504602" y="990224"/>
+                </a:lnTo>
+                <a:lnTo>
+                  <a:pt x="524786" y="1023356"/>
+                </a:lnTo>
+                <a:lnTo>
+                  <a:pt x="544970" y="1056047"/>
+                </a:lnTo>
+                <a:lnTo>
+                  <a:pt x="565154" y="1088304"/>
+                </a:lnTo>
+                <a:lnTo>
+                  <a:pt x="585338" y="1120133"/>
+                </a:lnTo>
+                <a:lnTo>
+                  <a:pt x="605522" y="1151538"/>
+                </a:lnTo>
+                <a:lnTo>
+                  <a:pt x="625706" y="1182526"/>
+                </a:lnTo>
+                <a:lnTo>
+                  <a:pt x="645890" y="1213103"/>
+                </a:lnTo>
+                <a:lnTo>
+                  <a:pt x="666074" y="1243273"/>
+                </a:lnTo>
+                <a:lnTo>
+                  <a:pt x="686258" y="1273042"/>
+                </a:lnTo>
+                <a:lnTo>
+                  <a:pt x="706442" y="1302415"/>
+                </a:lnTo>
+                <a:lnTo>
+                  <a:pt x="726626" y="1331398"/>
+                </a:lnTo>
+                <a:lnTo>
+                  <a:pt x="746810" y="1359996"/>
+                </a:lnTo>
+                <a:lnTo>
+                  <a:pt x="766995" y="1388214"/>
+                </a:lnTo>
+                <a:lnTo>
+                  <a:pt x="787179" y="1416057"/>
+                </a:lnTo>
+                <a:lnTo>
+                  <a:pt x="807363" y="1443530"/>
+                </a:lnTo>
+                <a:lnTo>
+                  <a:pt x="827547" y="1470638"/>
+                </a:lnTo>
+                <a:lnTo>
+                  <a:pt x="847731" y="1497386"/>
+                </a:lnTo>
+                <a:lnTo>
+                  <a:pt x="867915" y="1523778"/>
+                </a:lnTo>
+                <a:lnTo>
+                  <a:pt x="888099" y="1549819"/>
+                </a:lnTo>
+                <a:lnTo>
+                  <a:pt x="908283" y="1575515"/>
+                </a:lnTo>
+                <a:lnTo>
+                  <a:pt x="928467" y="1600869"/>
+                </a:lnTo>
+                <a:lnTo>
+                  <a:pt x="948651" y="1625886"/>
+                </a:lnTo>
+                <a:lnTo>
+                  <a:pt x="968835" y="1650570"/>
+                </a:lnTo>
+                <a:lnTo>
+                  <a:pt x="989019" y="1674927"/>
+                </a:lnTo>
+                <a:lnTo>
+                  <a:pt x="1009204" y="1698960"/>
+                </a:lnTo>
+                <a:lnTo>
+                  <a:pt x="1029388" y="1722673"/>
+                </a:lnTo>
+                <a:lnTo>
+                  <a:pt x="1049572" y="1746072"/>
+                </a:lnTo>
+                <a:lnTo>
+                  <a:pt x="1069756" y="1769159"/>
+                </a:lnTo>
+                <a:lnTo>
+                  <a:pt x="1089940" y="1791940"/>
+                </a:lnTo>
+                <a:lnTo>
+                  <a:pt x="1110124" y="1814418"/>
+                </a:lnTo>
+                <a:lnTo>
+                  <a:pt x="1130308" y="1836597"/>
+                </a:lnTo>
+                <a:lnTo>
+                  <a:pt x="1150492" y="1858481"/>
+                </a:lnTo>
+                <a:lnTo>
+                  <a:pt x="1170676" y="1880075"/>
+                </a:lnTo>
+                <a:lnTo>
+                  <a:pt x="1190860" y="1901382"/>
+                </a:lnTo>
+                <a:lnTo>
+                  <a:pt x="1211044" y="1922405"/>
+                </a:lnTo>
+                <a:lnTo>
+                  <a:pt x="1231228" y="1943150"/>
+                </a:lnTo>
+                <a:lnTo>
+                  <a:pt x="1251412" y="1963618"/>
+                </a:lnTo>
+                <a:lnTo>
+                  <a:pt x="1271597" y="1983815"/>
+                </a:lnTo>
+                <a:lnTo>
+                  <a:pt x="1291781" y="2003743"/>
+                </a:lnTo>
+                <a:lnTo>
+                  <a:pt x="1311965" y="2023406"/>
+                </a:lnTo>
+                <a:lnTo>
+                  <a:pt x="1332149" y="2042808"/>
+                </a:lnTo>
+                <a:lnTo>
+                  <a:pt x="1352333" y="2061952"/>
+                </a:lnTo>
+                <a:lnTo>
+                  <a:pt x="1372517" y="2080842"/>
+                </a:lnTo>
+                <a:lnTo>
+                  <a:pt x="1392701" y="2099481"/>
+                </a:lnTo>
+                <a:lnTo>
+                  <a:pt x="1412885" y="2117872"/>
+                </a:lnTo>
+                <a:lnTo>
+                  <a:pt x="1433069" y="2136018"/>
+                </a:lnTo>
+                <a:lnTo>
+                  <a:pt x="1453253" y="2153924"/>
+                </a:lnTo>
+                <a:lnTo>
+                  <a:pt x="1473437" y="2171592"/>
+                </a:lnTo>
+                <a:lnTo>
+                  <a:pt x="1493621" y="2189024"/>
+                </a:lnTo>
+                <a:lnTo>
+                  <a:pt x="1513806" y="2206225"/>
+                </a:lnTo>
+                <a:lnTo>
+                  <a:pt x="1533990" y="2223198"/>
+                </a:lnTo>
+                <a:lnTo>
+                  <a:pt x="1554174" y="2239945"/>
+                </a:lnTo>
+                <a:lnTo>
+                  <a:pt x="1574358" y="2256469"/>
+                </a:lnTo>
+                <a:lnTo>
+                  <a:pt x="1594542" y="2272774"/>
+                </a:lnTo>
+                <a:lnTo>
+                  <a:pt x="1614726" y="2288863"/>
+                </a:lnTo>
+                <a:lnTo>
+                  <a:pt x="1634910" y="2304737"/>
+                </a:lnTo>
+                <a:lnTo>
+                  <a:pt x="1655094" y="2320400"/>
+                </a:lnTo>
+                <a:lnTo>
+                  <a:pt x="1675278" y="2335856"/>
+                </a:lnTo>
+                <a:lnTo>
+                  <a:pt x="1695462" y="2351106"/>
+                </a:lnTo>
+                <a:lnTo>
+                  <a:pt x="1715646" y="2366153"/>
+                </a:lnTo>
+                <a:lnTo>
+                  <a:pt x="1735830" y="2381000"/>
+                </a:lnTo>
+                <a:lnTo>
+                  <a:pt x="1756014" y="2395650"/>
+                </a:lnTo>
+                <a:lnTo>
+                  <a:pt x="1776199" y="2410105"/>
+                </a:lnTo>
+                <a:lnTo>
+                  <a:pt x="1796383" y="2424369"/>
+                </a:lnTo>
+                <a:lnTo>
+                  <a:pt x="1816567" y="2438442"/>
+                </a:lnTo>
+                <a:lnTo>
+                  <a:pt x="1836751" y="2452329"/>
+                </a:lnTo>
+                <a:lnTo>
+                  <a:pt x="1856935" y="2466031"/>
+                </a:lnTo>
+                <a:lnTo>
+                  <a:pt x="1877119" y="2479551"/>
+                </a:lnTo>
+                <a:lnTo>
+                  <a:pt x="1897303" y="2492891"/>
+                </a:lnTo>
+                <a:lnTo>
+                  <a:pt x="1917487" y="2506055"/>
+                </a:lnTo>
+                <a:lnTo>
+                  <a:pt x="1937671" y="2519043"/>
+                </a:lnTo>
+                <a:lnTo>
+                  <a:pt x="1957855" y="2531858"/>
+                </a:lnTo>
+                <a:lnTo>
+                  <a:pt x="1978039" y="2544504"/>
+                </a:lnTo>
+                <a:lnTo>
+                  <a:pt x="1998223" y="2556981"/>
+                </a:lnTo>
+                <a:lnTo>
+                  <a:pt x="2018408" y="2569292"/>
+                </a:lnTo>
+                <a:lnTo>
+                  <a:pt x="2038592" y="2581440"/>
+                </a:lnTo>
+                <a:lnTo>
+                  <a:pt x="2058776" y="2593426"/>
+                </a:lnTo>
+                <a:lnTo>
+                  <a:pt x="2078960" y="2605254"/>
+                </a:lnTo>
+                <a:lnTo>
+                  <a:pt x="2099144" y="2616923"/>
+                </a:lnTo>
+                <a:lnTo>
+                  <a:pt x="2119328" y="2628438"/>
+                </a:lnTo>
+                <a:lnTo>
+                  <a:pt x="2139512" y="2639800"/>
+                </a:lnTo>
+                <a:lnTo>
+                  <a:pt x="2159696" y="2651011"/>
+                </a:lnTo>
+                <a:lnTo>
+                  <a:pt x="2179880" y="2662073"/>
+                </a:lnTo>
+                <a:lnTo>
+                  <a:pt x="2200064" y="2672988"/>
+                </a:lnTo>
+                <a:lnTo>
+                  <a:pt x="2220248" y="2683757"/>
+                </a:lnTo>
+                <a:lnTo>
+                  <a:pt x="2240432" y="2694384"/>
+                </a:lnTo>
+                <a:lnTo>
+                  <a:pt x="2260616" y="2704870"/>
+                </a:lnTo>
+                <a:lnTo>
+                  <a:pt x="2280801" y="2715216"/>
+                </a:lnTo>
+                <a:lnTo>
+                  <a:pt x="2300985" y="2725424"/>
+                </a:lnTo>
+                <a:lnTo>
+                  <a:pt x="2321169" y="2735497"/>
+                </a:lnTo>
+                <a:lnTo>
+                  <a:pt x="2341353" y="2745437"/>
+                </a:lnTo>
+                <a:lnTo>
+                  <a:pt x="2361537" y="2755244"/>
+                </a:lnTo>
+                <a:lnTo>
+                  <a:pt x="2381721" y="2764920"/>
+                </a:lnTo>
+                <a:lnTo>
+                  <a:pt x="2401905" y="2774469"/>
+                </a:lnTo>
+                <a:lnTo>
+                  <a:pt x="2422089" y="2783890"/>
+                </a:lnTo>
+                <a:lnTo>
+                  <a:pt x="2442273" y="2793186"/>
+                </a:lnTo>
+                <a:lnTo>
+                  <a:pt x="2462457" y="2802358"/>
+                </a:lnTo>
+                <a:lnTo>
+                  <a:pt x="2482641" y="2811409"/>
+                </a:lnTo>
+                <a:lnTo>
+                  <a:pt x="2502825" y="2820339"/>
+                </a:lnTo>
+                <a:lnTo>
+                  <a:pt x="2523010" y="2829151"/>
+                </a:lnTo>
+                <a:lnTo>
+                  <a:pt x="2543194" y="2837846"/>
+                </a:lnTo>
+                <a:lnTo>
+                  <a:pt x="2563378" y="2846425"/>
+                </a:lnTo>
+                <a:lnTo>
+                  <a:pt x="2583562" y="2854890"/>
+                </a:lnTo>
+                <a:lnTo>
+                  <a:pt x="2603746" y="2863242"/>
+                </a:lnTo>
+                <a:lnTo>
+                  <a:pt x="2623930" y="2871484"/>
+                </a:lnTo>
+                <a:lnTo>
+                  <a:pt x="2644114" y="2879616"/>
+                </a:lnTo>
+                <a:lnTo>
+                  <a:pt x="2664298" y="2887640"/>
+                </a:lnTo>
+                <a:lnTo>
+                  <a:pt x="2684482" y="2895557"/>
+                </a:lnTo>
+                <a:lnTo>
+                  <a:pt x="2704666" y="2903369"/>
+                </a:lnTo>
+                <a:lnTo>
+                  <a:pt x="2724850" y="2911078"/>
+                </a:lnTo>
+                <a:lnTo>
+                  <a:pt x="2745034" y="2918683"/>
+                </a:lnTo>
+                <a:lnTo>
+                  <a:pt x="2765218" y="2926188"/>
+                </a:lnTo>
+                <a:lnTo>
+                  <a:pt x="2785403" y="2933593"/>
+                </a:lnTo>
+                <a:lnTo>
+                  <a:pt x="2805587" y="2940900"/>
+                </a:lnTo>
+                <a:lnTo>
+                  <a:pt x="2825771" y="2948110"/>
+                </a:lnTo>
+                <a:lnTo>
+                  <a:pt x="2845955" y="2955223"/>
+                </a:lnTo>
+                <a:lnTo>
+                  <a:pt x="2866139" y="2962243"/>
+                </a:lnTo>
+                <a:lnTo>
+                  <a:pt x="2886323" y="2969169"/>
+                </a:lnTo>
+                <a:lnTo>
+                  <a:pt x="2906507" y="2976002"/>
+                </a:lnTo>
+                <a:lnTo>
+                  <a:pt x="2926691" y="2982746"/>
+                </a:lnTo>
+                <a:lnTo>
+                  <a:pt x="2946875" y="2989399"/>
+                </a:lnTo>
+                <a:lnTo>
+                  <a:pt x="2967059" y="2995964"/>
+                </a:lnTo>
+                <a:lnTo>
+                  <a:pt x="2987243" y="3002442"/>
+                </a:lnTo>
+                <a:lnTo>
+                  <a:pt x="3007427" y="3008834"/>
+                </a:lnTo>
+                <a:lnTo>
+                  <a:pt x="3027612" y="3015141"/>
+                </a:lnTo>
+                <a:lnTo>
+                  <a:pt x="3047796" y="3021364"/>
+                </a:lnTo>
+                <a:lnTo>
+                  <a:pt x="3067980" y="3027504"/>
+                </a:lnTo>
+                <a:lnTo>
+                  <a:pt x="3088164" y="3033563"/>
+                </a:lnTo>
+                <a:lnTo>
+                  <a:pt x="3108348" y="3039541"/>
+                </a:lnTo>
+                <a:lnTo>
+                  <a:pt x="3128532" y="3045440"/>
+                </a:lnTo>
+                <a:lnTo>
+                  <a:pt x="3148716" y="3051260"/>
+                </a:lnTo>
+                <a:lnTo>
+                  <a:pt x="3168900" y="3057003"/>
+                </a:lnTo>
+                <a:lnTo>
+                  <a:pt x="3189084" y="3062670"/>
+                </a:lnTo>
+                <a:lnTo>
+                  <a:pt x="3209268" y="3068261"/>
+                </a:lnTo>
+                <a:lnTo>
+                  <a:pt x="3229452" y="3073778"/>
+                </a:lnTo>
+                <a:lnTo>
+                  <a:pt x="3249636" y="3079222"/>
+                </a:lnTo>
+                <a:lnTo>
+                  <a:pt x="3269821" y="3084593"/>
+                </a:lnTo>
+                <a:lnTo>
+                  <a:pt x="3290005" y="3089893"/>
+                </a:lnTo>
+                <a:lnTo>
+                  <a:pt x="3310189" y="3095123"/>
+                </a:lnTo>
+                <a:lnTo>
+                  <a:pt x="3330373" y="3100283"/>
+                </a:lnTo>
+                <a:lnTo>
+                  <a:pt x="3350557" y="3105375"/>
+                </a:lnTo>
+                <a:lnTo>
+                  <a:pt x="3370741" y="3110399"/>
+                </a:lnTo>
+                <a:lnTo>
+                  <a:pt x="3390925" y="3115356"/>
+                </a:lnTo>
+                <a:lnTo>
+                  <a:pt x="3411109" y="3120247"/>
+                </a:lnTo>
+                <a:lnTo>
+                  <a:pt x="3431293" y="3125073"/>
+                </a:lnTo>
+                <a:lnTo>
+                  <a:pt x="3451477" y="3129835"/>
+                </a:lnTo>
+                <a:lnTo>
+                  <a:pt x="3471661" y="3134534"/>
+                </a:lnTo>
+                <a:lnTo>
+                  <a:pt x="3491845" y="3139171"/>
+                </a:lnTo>
+                <a:lnTo>
+                  <a:pt x="3512029" y="3143745"/>
+                </a:lnTo>
+                <a:lnTo>
+                  <a:pt x="3532214" y="3148259"/>
+                </a:lnTo>
+                <a:lnTo>
+                  <a:pt x="3552398" y="3152713"/>
+                </a:lnTo>
+                <a:lnTo>
+                  <a:pt x="3572582" y="3157108"/>
+                </a:lnTo>
+                <a:lnTo>
+                  <a:pt x="3592766" y="3161445"/>
+                </a:lnTo>
+                <a:lnTo>
+                  <a:pt x="3612950" y="3165723"/>
+                </a:lnTo>
+                <a:lnTo>
+                  <a:pt x="3633134" y="3169945"/>
+                </a:lnTo>
+                <a:lnTo>
+                  <a:pt x="3653318" y="3174111"/>
+                </a:lnTo>
+                <a:lnTo>
+                  <a:pt x="3673502" y="3178222"/>
+                </a:lnTo>
+                <a:lnTo>
+                  <a:pt x="3693686" y="3182278"/>
+                </a:lnTo>
+                <a:lnTo>
+                  <a:pt x="3713870" y="3186279"/>
+                </a:lnTo>
+                <a:lnTo>
+                  <a:pt x="3734054" y="3190228"/>
+                </a:lnTo>
+                <a:lnTo>
+                  <a:pt x="3754238" y="3194125"/>
+                </a:lnTo>
+                <a:lnTo>
+                  <a:pt x="3774423" y="3197969"/>
+                </a:lnTo>
+                <a:lnTo>
+                  <a:pt x="3794607" y="3201762"/>
+                </a:lnTo>
+                <a:lnTo>
+                  <a:pt x="3814791" y="3205505"/>
+                </a:lnTo>
+                <a:lnTo>
+                  <a:pt x="3834975" y="3209199"/>
+                </a:lnTo>
+                <a:lnTo>
+                  <a:pt x="3855159" y="3212843"/>
+                </a:lnTo>
+                <a:lnTo>
+                  <a:pt x="3875343" y="3216439"/>
+                </a:lnTo>
+                <a:lnTo>
+                  <a:pt x="3895527" y="3219987"/>
+                </a:lnTo>
+                <a:lnTo>
+                  <a:pt x="3915711" y="3223488"/>
+                </a:lnTo>
+                <a:lnTo>
+                  <a:pt x="3935895" y="3226942"/>
+                </a:lnTo>
+                <a:lnTo>
+                  <a:pt x="3956079" y="3230350"/>
+                </a:lnTo>
+                <a:lnTo>
+                  <a:pt x="3976263" y="3233713"/>
+                </a:lnTo>
+                <a:lnTo>
+                  <a:pt x="3996447" y="3237032"/>
+                </a:lnTo>
+                <a:lnTo>
+                  <a:pt x="4016631" y="3240306"/>
+                </a:lnTo>
+                <a:lnTo>
+                  <a:pt x="4036816" y="3243537"/>
+                </a:lnTo>
+                <a:lnTo>
+                  <a:pt x="4057000" y="3246725"/>
+                </a:lnTo>
+                <a:lnTo>
+                  <a:pt x="4077184" y="3249870"/>
+                </a:lnTo>
+                <a:lnTo>
+                  <a:pt x="4097368" y="3252974"/>
+                </a:lnTo>
+                <a:lnTo>
+                  <a:pt x="4117552" y="3256037"/>
+                </a:lnTo>
+                <a:lnTo>
+                  <a:pt x="4137736" y="3259058"/>
+                </a:lnTo>
+                <a:lnTo>
+                  <a:pt x="4157920" y="3262040"/>
+                </a:lnTo>
+                <a:lnTo>
+                  <a:pt x="4178104" y="3264982"/>
+                </a:lnTo>
+                <a:lnTo>
+                  <a:pt x="4198288" y="3267885"/>
+                </a:lnTo>
+                <a:lnTo>
+                  <a:pt x="4218472" y="3270749"/>
+                </a:lnTo>
+                <a:lnTo>
+                  <a:pt x="4238656" y="3273575"/>
+                </a:lnTo>
+                <a:lnTo>
+                  <a:pt x="4258840" y="3276364"/>
+                </a:lnTo>
+                <a:lnTo>
+                  <a:pt x="4279025" y="3279116"/>
+                </a:lnTo>
+                <a:lnTo>
+                  <a:pt x="4299209" y="3281831"/>
+                </a:lnTo>
+                <a:lnTo>
+                  <a:pt x="4319393" y="3284510"/>
+                </a:lnTo>
+                <a:lnTo>
+                  <a:pt x="4339577" y="3287153"/>
+                </a:lnTo>
+                <a:lnTo>
+                  <a:pt x="4359761" y="3289761"/>
+                </a:lnTo>
+                <a:lnTo>
+                  <a:pt x="4379945" y="3292335"/>
+                </a:lnTo>
+                <a:lnTo>
+                  <a:pt x="4400129" y="3294875"/>
+                </a:lnTo>
+                <a:lnTo>
+                  <a:pt x="4420313" y="3297380"/>
+                </a:lnTo>
+                <a:lnTo>
+                  <a:pt x="4440497" y="3299853"/>
+                </a:lnTo>
+                <a:lnTo>
+                  <a:pt x="4460681" y="3302292"/>
+                </a:lnTo>
+                <a:lnTo>
+                  <a:pt x="4480865" y="3304699"/>
+                </a:lnTo>
+                <a:lnTo>
+                  <a:pt x="4501049" y="3307074"/>
+                </a:lnTo>
+                <a:lnTo>
+                  <a:pt x="4521233" y="3309418"/>
+                </a:lnTo>
+                <a:lnTo>
+                  <a:pt x="4541418" y="3311730"/>
+                </a:lnTo>
+                <a:lnTo>
+                  <a:pt x="4561602" y="3314012"/>
+                </a:lnTo>
+                <a:lnTo>
+                  <a:pt x="4581786" y="3316263"/>
+                </a:lnTo>
+                <a:lnTo>
+                  <a:pt x="4601970" y="3318485"/>
+                </a:lnTo>
+                <a:lnTo>
+                  <a:pt x="4622154" y="3320677"/>
+                </a:lnTo>
+                <a:lnTo>
+                  <a:pt x="4642338" y="3322839"/>
+                </a:lnTo>
+                <a:lnTo>
+                  <a:pt x="4662522" y="3324973"/>
+                </a:lnTo>
+                <a:lnTo>
+                  <a:pt x="4682706" y="3327079"/>
+                </a:lnTo>
+                <a:lnTo>
+                  <a:pt x="4702890" y="3329157"/>
+                </a:lnTo>
+                <a:lnTo>
+                  <a:pt x="4723074" y="3331207"/>
+                </a:lnTo>
+                <a:lnTo>
+                  <a:pt x="4743258" y="3333230"/>
+                </a:lnTo>
+                <a:lnTo>
+                  <a:pt x="4763442" y="3335226"/>
+                </a:lnTo>
+                <a:lnTo>
+                  <a:pt x="4783627" y="3337195"/>
+                </a:lnTo>
+                <a:lnTo>
+                  <a:pt x="4803811" y="3339138"/>
+                </a:lnTo>
+                <a:lnTo>
+                  <a:pt x="4823995" y="3341056"/>
+                </a:lnTo>
+                <a:lnTo>
+                  <a:pt x="4844179" y="3342948"/>
+                </a:lnTo>
+                <a:lnTo>
+                  <a:pt x="4864363" y="3344815"/>
+                </a:lnTo>
+                <a:lnTo>
+                  <a:pt x="4884547" y="3346657"/>
+                </a:lnTo>
+                <a:lnTo>
+                  <a:pt x="4904731" y="3348474"/>
+                </a:lnTo>
+                <a:lnTo>
+                  <a:pt x="4924915" y="3350268"/>
+                </a:lnTo>
+                <a:lnTo>
+                  <a:pt x="4945099" y="3352037"/>
+                </a:lnTo>
+                <a:lnTo>
+                  <a:pt x="4965283" y="3353783"/>
+                </a:lnTo>
+                <a:lnTo>
+                  <a:pt x="4985467" y="3355506"/>
+                </a:lnTo>
+                <a:lnTo>
+                  <a:pt x="5005651" y="3357206"/>
+                </a:lnTo>
+                <a:lnTo>
+                  <a:pt x="5025835" y="3358883"/>
+                </a:lnTo>
+                <a:lnTo>
+                  <a:pt x="5046020" y="3360538"/>
+                </a:lnTo>
+                <a:lnTo>
+                  <a:pt x="5066204" y="3362171"/>
+                </a:lnTo>
+                <a:lnTo>
+                  <a:pt x="5086388" y="3363783"/>
+                </a:lnTo>
+                <a:lnTo>
+                  <a:pt x="5106572" y="3365373"/>
+                </a:lnTo>
+                <a:lnTo>
+                  <a:pt x="5126756" y="3366942"/>
+                </a:lnTo>
+                <a:lnTo>
+                  <a:pt x="5146940" y="3368490"/>
+                </a:lnTo>
+                <a:lnTo>
+                  <a:pt x="5167124" y="3370017"/>
+                </a:lnTo>
+                <a:lnTo>
+                  <a:pt x="5187308" y="3371524"/>
+                </a:lnTo>
+                <a:lnTo>
+                  <a:pt x="5207492" y="3373011"/>
+                </a:lnTo>
+                <a:lnTo>
+                  <a:pt x="5227676" y="3374478"/>
+                </a:lnTo>
+                <a:lnTo>
+                  <a:pt x="5247860" y="3375926"/>
+                </a:lnTo>
+                <a:lnTo>
+                  <a:pt x="5268044" y="3377355"/>
+                </a:lnTo>
+                <a:lnTo>
+                  <a:pt x="5288229" y="3378764"/>
+                </a:lnTo>
+                <a:lnTo>
+                  <a:pt x="5308413" y="3380155"/>
+                </a:lnTo>
+                <a:lnTo>
+                  <a:pt x="5328597" y="3381528"/>
+                </a:lnTo>
+                <a:lnTo>
+                  <a:pt x="5348781" y="3382882"/>
+                </a:lnTo>
+                <a:lnTo>
+                  <a:pt x="5368965" y="3384218"/>
+                </a:lnTo>
+                <a:lnTo>
+                  <a:pt x="5389149" y="3385536"/>
+                </a:lnTo>
+                <a:lnTo>
+                  <a:pt x="5409333" y="3386837"/>
+                </a:lnTo>
+                <a:lnTo>
+                  <a:pt x="5429517" y="3388121"/>
+                </a:lnTo>
+                <a:lnTo>
+                  <a:pt x="5449701" y="3389387"/>
+                </a:lnTo>
+                <a:lnTo>
+                  <a:pt x="5469885" y="3390637"/>
+                </a:lnTo>
+                <a:lnTo>
+                  <a:pt x="5490069" y="3391870"/>
+                </a:lnTo>
+                <a:lnTo>
+                  <a:pt x="5510253" y="3393087"/>
+                </a:lnTo>
+                <a:lnTo>
+                  <a:pt x="5530437" y="3394287"/>
+                </a:lnTo>
+                <a:lnTo>
+                  <a:pt x="5550622" y="3395472"/>
+                </a:lnTo>
+                <a:lnTo>
+                  <a:pt x="5570806" y="3396641"/>
+                </a:lnTo>
+                <a:lnTo>
+                  <a:pt x="5590990" y="3397794"/>
+                </a:lnTo>
+                <a:lnTo>
+                  <a:pt x="5611174" y="3398932"/>
+                </a:lnTo>
+                <a:lnTo>
+                  <a:pt x="5631358" y="3400055"/>
+                </a:lnTo>
+                <a:lnTo>
+                  <a:pt x="5651542" y="3401163"/>
+                </a:lnTo>
+                <a:lnTo>
+                  <a:pt x="5671726" y="3402256"/>
+                </a:lnTo>
+                <a:lnTo>
+                  <a:pt x="5691910" y="3403335"/>
+                </a:lnTo>
+                <a:lnTo>
+                  <a:pt x="5712094" y="3404399"/>
+                </a:lnTo>
+                <a:lnTo>
+                  <a:pt x="5732278" y="3405449"/>
+                </a:lnTo>
+                <a:lnTo>
+                  <a:pt x="5752462" y="3406486"/>
+                </a:lnTo>
+                <a:lnTo>
+                  <a:pt x="5772646" y="3407508"/>
+                </a:lnTo>
+                <a:lnTo>
+                  <a:pt x="5792831" y="3408517"/>
+                </a:lnTo>
+                <a:lnTo>
+                  <a:pt x="5813015" y="3409512"/>
+                </a:lnTo>
+                <a:lnTo>
+                  <a:pt x="5833199" y="3410495"/>
+                </a:lnTo>
+                <a:lnTo>
+                  <a:pt x="5853383" y="3411464"/>
+                </a:lnTo>
+                <a:lnTo>
+                  <a:pt x="5873567" y="3412420"/>
+                </a:lnTo>
+                <a:lnTo>
+                  <a:pt x="5893751" y="3413364"/>
+                </a:lnTo>
+                <a:lnTo>
+                  <a:pt x="5913935" y="3414295"/>
+                </a:lnTo>
+                <a:lnTo>
+                  <a:pt x="5934119" y="3415214"/>
+                </a:lnTo>
+                <a:lnTo>
+                  <a:pt x="5954303" y="3416120"/>
+                </a:lnTo>
+                <a:lnTo>
+                  <a:pt x="5974487" y="3417015"/>
+                </a:lnTo>
+                <a:lnTo>
+                  <a:pt x="5994671" y="3417897"/>
+                </a:lnTo>
+                <a:lnTo>
+                  <a:pt x="6014855" y="3418768"/>
+                </a:lnTo>
+                <a:lnTo>
+                  <a:pt x="6035040" y="3419627"/>
+                </a:lnTo>
+                <a:lnTo>
+                  <a:pt x="6035040" y="3483429"/>
+                </a:lnTo>
+                <a:lnTo>
+                  <a:pt x="6014855" y="3483429"/>
+                </a:lnTo>
+                <a:lnTo>
+                  <a:pt x="5994671" y="3483429"/>
+                </a:lnTo>
+                <a:lnTo>
+                  <a:pt x="5974487" y="3483429"/>
+                </a:lnTo>
+                <a:lnTo>
+                  <a:pt x="5954303" y="3483429"/>
+                </a:lnTo>
+                <a:lnTo>
+                  <a:pt x="5934119" y="3483429"/>
+                </a:lnTo>
+                <a:lnTo>
+                  <a:pt x="5913935" y="3483429"/>
+                </a:lnTo>
+                <a:lnTo>
+                  <a:pt x="5893751" y="3483429"/>
+                </a:lnTo>
+                <a:lnTo>
+                  <a:pt x="5873567" y="3483429"/>
+                </a:lnTo>
+                <a:lnTo>
+                  <a:pt x="5853383" y="3483429"/>
+                </a:lnTo>
+                <a:lnTo>
+                  <a:pt x="5833199" y="3483429"/>
+                </a:lnTo>
+                <a:lnTo>
+                  <a:pt x="5813015" y="3483429"/>
+                </a:lnTo>
+                <a:lnTo>
+                  <a:pt x="5792831" y="3483429"/>
+                </a:lnTo>
+                <a:lnTo>
+                  <a:pt x="5772646" y="3483429"/>
+                </a:lnTo>
+                <a:lnTo>
+                  <a:pt x="5752462" y="3483429"/>
+                </a:lnTo>
+                <a:lnTo>
+                  <a:pt x="5732278" y="3483429"/>
+                </a:lnTo>
+                <a:lnTo>
+                  <a:pt x="5712094" y="3483429"/>
+                </a:lnTo>
+                <a:lnTo>
+                  <a:pt x="5691910" y="3483429"/>
+                </a:lnTo>
+                <a:lnTo>
+                  <a:pt x="5671726" y="3483429"/>
+                </a:lnTo>
+                <a:lnTo>
+                  <a:pt x="5651542" y="3483429"/>
+                </a:lnTo>
+                <a:lnTo>
+                  <a:pt x="5631358" y="3483429"/>
+                </a:lnTo>
+                <a:lnTo>
+                  <a:pt x="5611174" y="3483429"/>
+                </a:lnTo>
+                <a:lnTo>
+                  <a:pt x="5590990" y="3483429"/>
+                </a:lnTo>
+                <a:lnTo>
+                  <a:pt x="5570806" y="3483429"/>
+                </a:lnTo>
+                <a:lnTo>
+                  <a:pt x="5550622" y="3483429"/>
+                </a:lnTo>
+                <a:lnTo>
+                  <a:pt x="5530437" y="3483429"/>
+                </a:lnTo>
+                <a:lnTo>
+                  <a:pt x="5510253" y="3483429"/>
+                </a:lnTo>
+                <a:lnTo>
+                  <a:pt x="5490069" y="3483429"/>
+                </a:lnTo>
+                <a:lnTo>
+                  <a:pt x="5469885" y="3483429"/>
+                </a:lnTo>
+                <a:lnTo>
+                  <a:pt x="5449701" y="3483429"/>
+                </a:lnTo>
+                <a:lnTo>
+                  <a:pt x="5429517" y="3483429"/>
+                </a:lnTo>
+                <a:lnTo>
+                  <a:pt x="5409333" y="3483429"/>
+                </a:lnTo>
+                <a:lnTo>
+                  <a:pt x="5389149" y="3483429"/>
+                </a:lnTo>
+                <a:lnTo>
+                  <a:pt x="5368965" y="3483429"/>
+                </a:lnTo>
+                <a:lnTo>
+                  <a:pt x="5348781" y="3483429"/>
+                </a:lnTo>
+                <a:lnTo>
+                  <a:pt x="5328597" y="3483429"/>
+                </a:lnTo>
+                <a:lnTo>
+                  <a:pt x="5308413" y="3483429"/>
+                </a:lnTo>
+                <a:lnTo>
+                  <a:pt x="5288229" y="3483429"/>
+                </a:lnTo>
+                <a:lnTo>
+                  <a:pt x="5268044" y="3483429"/>
+                </a:lnTo>
+                <a:lnTo>
+                  <a:pt x="5247860" y="3483429"/>
+                </a:lnTo>
+                <a:lnTo>
+                  <a:pt x="5227676" y="3483429"/>
+                </a:lnTo>
+                <a:lnTo>
+                  <a:pt x="5207492" y="3483429"/>
+                </a:lnTo>
+                <a:lnTo>
+                  <a:pt x="5187308" y="3483429"/>
+                </a:lnTo>
+                <a:lnTo>
+                  <a:pt x="5167124" y="3483429"/>
+                </a:lnTo>
+                <a:lnTo>
+                  <a:pt x="5146940" y="3483429"/>
+                </a:lnTo>
+                <a:lnTo>
+                  <a:pt x="5126756" y="3483429"/>
+                </a:lnTo>
+                <a:lnTo>
+                  <a:pt x="5106572" y="3483429"/>
+                </a:lnTo>
+                <a:lnTo>
+                  <a:pt x="5086388" y="3483429"/>
+                </a:lnTo>
+                <a:lnTo>
+                  <a:pt x="5066204" y="3483429"/>
+                </a:lnTo>
+                <a:lnTo>
+                  <a:pt x="5046020" y="3483429"/>
+                </a:lnTo>
+                <a:lnTo>
+                  <a:pt x="5025835" y="3483429"/>
+                </a:lnTo>
+                <a:lnTo>
+                  <a:pt x="5005651" y="3483429"/>
+                </a:lnTo>
+                <a:lnTo>
+                  <a:pt x="4985467" y="3483429"/>
+                </a:lnTo>
+                <a:lnTo>
+                  <a:pt x="4965283" y="3483429"/>
+                </a:lnTo>
+                <a:lnTo>
+                  <a:pt x="4945099" y="3483429"/>
+                </a:lnTo>
+                <a:lnTo>
+                  <a:pt x="4924915" y="3483429"/>
+                </a:lnTo>
+                <a:lnTo>
+                  <a:pt x="4904731" y="3483429"/>
+                </a:lnTo>
+                <a:lnTo>
+                  <a:pt x="4884547" y="3483429"/>
+                </a:lnTo>
+                <a:lnTo>
+                  <a:pt x="4864363" y="3483429"/>
+                </a:lnTo>
+                <a:lnTo>
+                  <a:pt x="4844179" y="3483429"/>
+                </a:lnTo>
+                <a:lnTo>
+                  <a:pt x="4823995" y="3483429"/>
+                </a:lnTo>
+                <a:lnTo>
+                  <a:pt x="4803811" y="3483429"/>
+                </a:lnTo>
+                <a:lnTo>
+                  <a:pt x="4783627" y="3483429"/>
+                </a:lnTo>
+                <a:lnTo>
+                  <a:pt x="4763442" y="3483429"/>
+                </a:lnTo>
+                <a:lnTo>
+                  <a:pt x="4743258" y="3483429"/>
+                </a:lnTo>
+                <a:lnTo>
+                  <a:pt x="4723074" y="3483429"/>
+                </a:lnTo>
+                <a:lnTo>
+                  <a:pt x="4702890" y="3483429"/>
+                </a:lnTo>
+                <a:lnTo>
+                  <a:pt x="4682706" y="3483429"/>
+                </a:lnTo>
+                <a:lnTo>
+                  <a:pt x="4662522" y="3483429"/>
+                </a:lnTo>
+                <a:lnTo>
+                  <a:pt x="4642338" y="3483429"/>
+                </a:lnTo>
+                <a:lnTo>
+                  <a:pt x="4622154" y="3483429"/>
+                </a:lnTo>
+                <a:lnTo>
+                  <a:pt x="4601970" y="3483429"/>
+                </a:lnTo>
+                <a:lnTo>
+                  <a:pt x="4581786" y="3483429"/>
+                </a:lnTo>
+                <a:lnTo>
+                  <a:pt x="4561602" y="3483429"/>
+                </a:lnTo>
+                <a:lnTo>
+                  <a:pt x="4541418" y="3483429"/>
+                </a:lnTo>
+                <a:lnTo>
+                  <a:pt x="4521233" y="3483429"/>
+                </a:lnTo>
+                <a:lnTo>
+                  <a:pt x="4501049" y="3483429"/>
+                </a:lnTo>
+                <a:lnTo>
+                  <a:pt x="4480865" y="3483429"/>
+                </a:lnTo>
+                <a:lnTo>
+                  <a:pt x="4460681" y="3483429"/>
+                </a:lnTo>
+                <a:lnTo>
+                  <a:pt x="4440497" y="3483429"/>
+                </a:lnTo>
+                <a:lnTo>
+                  <a:pt x="4420313" y="3483429"/>
+                </a:lnTo>
+                <a:lnTo>
+                  <a:pt x="4400129" y="3483429"/>
+                </a:lnTo>
+                <a:lnTo>
+                  <a:pt x="4379945" y="3483429"/>
+                </a:lnTo>
+                <a:lnTo>
+                  <a:pt x="4359761" y="3483429"/>
+                </a:lnTo>
+                <a:lnTo>
+                  <a:pt x="4339577" y="3483429"/>
+                </a:lnTo>
+                <a:lnTo>
+                  <a:pt x="4319393" y="3483429"/>
+                </a:lnTo>
+                <a:lnTo>
+                  <a:pt x="4299209" y="3483429"/>
+                </a:lnTo>
+                <a:lnTo>
+                  <a:pt x="4279025" y="3483429"/>
+                </a:lnTo>
+                <a:lnTo>
+                  <a:pt x="4258840" y="3483429"/>
+                </a:lnTo>
+                <a:lnTo>
+                  <a:pt x="4238656" y="3483429"/>
+                </a:lnTo>
+                <a:lnTo>
+                  <a:pt x="4218472" y="3483429"/>
+                </a:lnTo>
+                <a:lnTo>
+                  <a:pt x="4198288" y="3483429"/>
+                </a:lnTo>
+                <a:lnTo>
+                  <a:pt x="4178104" y="3483429"/>
+                </a:lnTo>
+                <a:lnTo>
+                  <a:pt x="4157920" y="3483429"/>
+                </a:lnTo>
+                <a:lnTo>
+                  <a:pt x="4137736" y="3483429"/>
+                </a:lnTo>
+                <a:lnTo>
+                  <a:pt x="4117552" y="3483429"/>
+                </a:lnTo>
+                <a:lnTo>
+                  <a:pt x="4097368" y="3483429"/>
+                </a:lnTo>
+                <a:lnTo>
+                  <a:pt x="4077184" y="3483429"/>
+                </a:lnTo>
+                <a:lnTo>
+                  <a:pt x="4057000" y="3483429"/>
+                </a:lnTo>
+                <a:lnTo>
+                  <a:pt x="4036816" y="3483429"/>
+                </a:lnTo>
+                <a:lnTo>
+                  <a:pt x="4016631" y="3483429"/>
+                </a:lnTo>
+                <a:lnTo>
+                  <a:pt x="3996447" y="3483429"/>
+                </a:lnTo>
+                <a:lnTo>
+                  <a:pt x="3976263" y="3483429"/>
+                </a:lnTo>
+                <a:lnTo>
+                  <a:pt x="3956079" y="3483429"/>
+                </a:lnTo>
+                <a:lnTo>
+                  <a:pt x="3935895" y="3483429"/>
+                </a:lnTo>
+                <a:lnTo>
+                  <a:pt x="3915711" y="3483429"/>
+                </a:lnTo>
+                <a:lnTo>
+                  <a:pt x="3895527" y="3483429"/>
+                </a:lnTo>
+                <a:lnTo>
+                  <a:pt x="3875343" y="3483429"/>
+                </a:lnTo>
+                <a:lnTo>
+                  <a:pt x="3855159" y="3483429"/>
+                </a:lnTo>
+                <a:lnTo>
+                  <a:pt x="3834975" y="3483429"/>
+                </a:lnTo>
+                <a:lnTo>
+                  <a:pt x="3814791" y="3483429"/>
+                </a:lnTo>
+                <a:lnTo>
+                  <a:pt x="3794607" y="3483429"/>
+                </a:lnTo>
+                <a:lnTo>
+                  <a:pt x="3774423" y="3483429"/>
+                </a:lnTo>
+                <a:lnTo>
+                  <a:pt x="3754238" y="3483429"/>
+                </a:lnTo>
+                <a:lnTo>
+                  <a:pt x="3734054" y="3483429"/>
+                </a:lnTo>
+                <a:lnTo>
+                  <a:pt x="3713870" y="3483429"/>
+                </a:lnTo>
+                <a:lnTo>
+                  <a:pt x="3693686" y="3483429"/>
+                </a:lnTo>
+                <a:lnTo>
+                  <a:pt x="3673502" y="3483429"/>
+                </a:lnTo>
+                <a:lnTo>
+                  <a:pt x="3653318" y="3483429"/>
+                </a:lnTo>
+                <a:lnTo>
+                  <a:pt x="3633134" y="3483429"/>
+                </a:lnTo>
+                <a:lnTo>
+                  <a:pt x="3612950" y="3483429"/>
+                </a:lnTo>
+                <a:lnTo>
+                  <a:pt x="3592766" y="3483429"/>
+                </a:lnTo>
+                <a:lnTo>
+                  <a:pt x="3572582" y="3483429"/>
+                </a:lnTo>
+                <a:lnTo>
+                  <a:pt x="3552398" y="3483429"/>
+                </a:lnTo>
+                <a:lnTo>
+                  <a:pt x="3532214" y="3483429"/>
+                </a:lnTo>
+                <a:lnTo>
+                  <a:pt x="3512029" y="3483429"/>
+                </a:lnTo>
+                <a:lnTo>
+                  <a:pt x="3491845" y="3483429"/>
+                </a:lnTo>
+                <a:lnTo>
+                  <a:pt x="3471661" y="3483429"/>
+                </a:lnTo>
+                <a:lnTo>
+                  <a:pt x="3451477" y="3483429"/>
+                </a:lnTo>
+                <a:lnTo>
+                  <a:pt x="3431293" y="3483429"/>
+                </a:lnTo>
+                <a:lnTo>
+                  <a:pt x="3411109" y="3483429"/>
+                </a:lnTo>
+                <a:lnTo>
+                  <a:pt x="3390925" y="3483429"/>
+                </a:lnTo>
+                <a:lnTo>
+                  <a:pt x="3370741" y="3483429"/>
+                </a:lnTo>
+                <a:lnTo>
+                  <a:pt x="3350557" y="3483429"/>
+                </a:lnTo>
+                <a:lnTo>
+                  <a:pt x="3330373" y="3483429"/>
+                </a:lnTo>
+                <a:lnTo>
+                  <a:pt x="3310189" y="3483429"/>
+                </a:lnTo>
+                <a:lnTo>
+                  <a:pt x="3290005" y="3483429"/>
+                </a:lnTo>
+                <a:lnTo>
+                  <a:pt x="3269821" y="3483429"/>
+                </a:lnTo>
+                <a:lnTo>
+                  <a:pt x="3249636" y="3483429"/>
+                </a:lnTo>
+                <a:lnTo>
+                  <a:pt x="3229452" y="3483429"/>
+                </a:lnTo>
+                <a:lnTo>
+                  <a:pt x="3209268" y="3483429"/>
+                </a:lnTo>
+                <a:lnTo>
+                  <a:pt x="3189084" y="3483429"/>
+                </a:lnTo>
+                <a:lnTo>
+                  <a:pt x="3168900" y="3483429"/>
+                </a:lnTo>
+                <a:lnTo>
+                  <a:pt x="3148716" y="3483429"/>
+                </a:lnTo>
+                <a:lnTo>
+                  <a:pt x="3128532" y="3483429"/>
+                </a:lnTo>
+                <a:lnTo>
+                  <a:pt x="3108348" y="3483429"/>
+                </a:lnTo>
+                <a:lnTo>
+                  <a:pt x="3088164" y="3483429"/>
+                </a:lnTo>
+                <a:lnTo>
+                  <a:pt x="3067980" y="3483429"/>
+                </a:lnTo>
+                <a:lnTo>
+                  <a:pt x="3047796" y="3483429"/>
+                </a:lnTo>
+                <a:lnTo>
+                  <a:pt x="3027612" y="3483429"/>
+                </a:lnTo>
+                <a:lnTo>
+                  <a:pt x="3007427" y="3483429"/>
+                </a:lnTo>
+                <a:lnTo>
+                  <a:pt x="2987243" y="3483429"/>
+                </a:lnTo>
+                <a:lnTo>
+                  <a:pt x="2967059" y="3483429"/>
+                </a:lnTo>
+                <a:lnTo>
+                  <a:pt x="2946875" y="3483429"/>
+                </a:lnTo>
+                <a:lnTo>
+                  <a:pt x="2926691" y="3483429"/>
+                </a:lnTo>
+                <a:lnTo>
+                  <a:pt x="2906507" y="3483429"/>
+                </a:lnTo>
+                <a:lnTo>
+                  <a:pt x="2886323" y="3483429"/>
+                </a:lnTo>
+                <a:lnTo>
+                  <a:pt x="2866139" y="3483429"/>
+                </a:lnTo>
+                <a:lnTo>
+                  <a:pt x="2845955" y="3483429"/>
+                </a:lnTo>
+                <a:lnTo>
+                  <a:pt x="2825771" y="3483429"/>
+                </a:lnTo>
+                <a:lnTo>
+                  <a:pt x="2805587" y="3483429"/>
+                </a:lnTo>
+                <a:lnTo>
+                  <a:pt x="2785403" y="3483429"/>
+                </a:lnTo>
+                <a:lnTo>
+                  <a:pt x="2765218" y="3483429"/>
+                </a:lnTo>
+                <a:lnTo>
+                  <a:pt x="2745034" y="3483429"/>
+                </a:lnTo>
+                <a:lnTo>
+                  <a:pt x="2724850" y="3483429"/>
+                </a:lnTo>
+                <a:lnTo>
+                  <a:pt x="2704666" y="3483429"/>
+                </a:lnTo>
+                <a:lnTo>
+                  <a:pt x="2684482" y="3483429"/>
+                </a:lnTo>
+                <a:lnTo>
+                  <a:pt x="2664298" y="3483429"/>
+                </a:lnTo>
+                <a:lnTo>
+                  <a:pt x="2644114" y="3483429"/>
+                </a:lnTo>
+                <a:lnTo>
+                  <a:pt x="2623930" y="3483429"/>
+                </a:lnTo>
+                <a:lnTo>
+                  <a:pt x="2603746" y="3483429"/>
+                </a:lnTo>
+                <a:lnTo>
+                  <a:pt x="2583562" y="3483429"/>
+                </a:lnTo>
+                <a:lnTo>
+                  <a:pt x="2563378" y="3483429"/>
+                </a:lnTo>
+                <a:lnTo>
+                  <a:pt x="2543194" y="3483429"/>
+                </a:lnTo>
+                <a:lnTo>
+                  <a:pt x="2523010" y="3483429"/>
+                </a:lnTo>
+                <a:lnTo>
+                  <a:pt x="2502825" y="3483429"/>
+                </a:lnTo>
+                <a:lnTo>
+                  <a:pt x="2482641" y="3483429"/>
+                </a:lnTo>
+                <a:lnTo>
+                  <a:pt x="2462457" y="3483429"/>
+                </a:lnTo>
+                <a:lnTo>
+                  <a:pt x="2442273" y="3483429"/>
+                </a:lnTo>
+                <a:lnTo>
+                  <a:pt x="2422089" y="3483429"/>
+                </a:lnTo>
+                <a:lnTo>
+                  <a:pt x="2401905" y="3483429"/>
+                </a:lnTo>
+                <a:lnTo>
+                  <a:pt x="2381721" y="3483429"/>
+                </a:lnTo>
+                <a:lnTo>
+                  <a:pt x="2361537" y="3483429"/>
+                </a:lnTo>
+                <a:lnTo>
+                  <a:pt x="2341353" y="3483429"/>
+                </a:lnTo>
+                <a:lnTo>
+                  <a:pt x="2321169" y="3483429"/>
+                </a:lnTo>
+                <a:lnTo>
+                  <a:pt x="2300985" y="3483429"/>
+                </a:lnTo>
+                <a:lnTo>
+                  <a:pt x="2280801" y="3483429"/>
+                </a:lnTo>
+                <a:lnTo>
+                  <a:pt x="2260616" y="3483429"/>
+                </a:lnTo>
+                <a:lnTo>
+                  <a:pt x="2240432" y="3483429"/>
+                </a:lnTo>
+                <a:lnTo>
+                  <a:pt x="2220248" y="3483429"/>
+                </a:lnTo>
+                <a:lnTo>
+                  <a:pt x="2200064" y="3483429"/>
+                </a:lnTo>
+                <a:lnTo>
+                  <a:pt x="2179880" y="3483429"/>
+                </a:lnTo>
+                <a:lnTo>
+                  <a:pt x="2159696" y="3483429"/>
+                </a:lnTo>
+                <a:lnTo>
+                  <a:pt x="2139512" y="3483429"/>
+                </a:lnTo>
+                <a:lnTo>
+                  <a:pt x="2119328" y="3483429"/>
+                </a:lnTo>
+                <a:lnTo>
+                  <a:pt x="2099144" y="3483429"/>
+                </a:lnTo>
+                <a:lnTo>
+                  <a:pt x="2078960" y="3483429"/>
+                </a:lnTo>
+                <a:lnTo>
+                  <a:pt x="2058776" y="3483429"/>
+                </a:lnTo>
+                <a:lnTo>
+                  <a:pt x="2038592" y="3483429"/>
+                </a:lnTo>
+                <a:lnTo>
+                  <a:pt x="2018408" y="3483429"/>
+                </a:lnTo>
+                <a:lnTo>
+                  <a:pt x="1998223" y="3483429"/>
+                </a:lnTo>
+                <a:lnTo>
+                  <a:pt x="1978039" y="3483429"/>
+                </a:lnTo>
+                <a:lnTo>
+                  <a:pt x="1957855" y="3483429"/>
+                </a:lnTo>
+                <a:lnTo>
+                  <a:pt x="1937671" y="3483429"/>
+                </a:lnTo>
+                <a:lnTo>
+                  <a:pt x="1917487" y="3483429"/>
+                </a:lnTo>
+                <a:lnTo>
+                  <a:pt x="1897303" y="3483429"/>
+                </a:lnTo>
+                <a:lnTo>
+                  <a:pt x="1877119" y="3483429"/>
+                </a:lnTo>
+                <a:lnTo>
+                  <a:pt x="1856935" y="3483429"/>
+                </a:lnTo>
+                <a:lnTo>
+                  <a:pt x="1836751" y="3483429"/>
+                </a:lnTo>
+                <a:lnTo>
+                  <a:pt x="1816567" y="3483429"/>
+                </a:lnTo>
+                <a:lnTo>
+                  <a:pt x="1796383" y="3483429"/>
+                </a:lnTo>
+                <a:lnTo>
+                  <a:pt x="1776199" y="3483429"/>
+                </a:lnTo>
+                <a:lnTo>
+                  <a:pt x="1756014" y="3483429"/>
+                </a:lnTo>
+                <a:lnTo>
+                  <a:pt x="1735830" y="3483429"/>
+                </a:lnTo>
+                <a:lnTo>
+                  <a:pt x="1715646" y="3483429"/>
+                </a:lnTo>
+                <a:lnTo>
+                  <a:pt x="1695462" y="3483429"/>
+                </a:lnTo>
+                <a:lnTo>
+                  <a:pt x="1675278" y="3483429"/>
+                </a:lnTo>
+                <a:lnTo>
+                  <a:pt x="1655094" y="3483429"/>
+                </a:lnTo>
+                <a:lnTo>
+                  <a:pt x="1634910" y="3483429"/>
+                </a:lnTo>
+                <a:lnTo>
+                  <a:pt x="1614726" y="3483429"/>
+                </a:lnTo>
+                <a:lnTo>
+                  <a:pt x="1594542" y="3483429"/>
+                </a:lnTo>
+                <a:lnTo>
+                  <a:pt x="1574358" y="3483429"/>
+                </a:lnTo>
+                <a:lnTo>
+                  <a:pt x="1554174" y="3483429"/>
+                </a:lnTo>
+                <a:lnTo>
+                  <a:pt x="1533990" y="3483429"/>
+                </a:lnTo>
+                <a:lnTo>
+                  <a:pt x="1513806" y="3483429"/>
+                </a:lnTo>
+                <a:lnTo>
+                  <a:pt x="1493621" y="3483429"/>
+                </a:lnTo>
+                <a:lnTo>
+                  <a:pt x="1473437" y="3483429"/>
+                </a:lnTo>
+                <a:lnTo>
+                  <a:pt x="1453253" y="3483429"/>
+                </a:lnTo>
+                <a:lnTo>
+                  <a:pt x="1433069" y="3483429"/>
+                </a:lnTo>
+                <a:lnTo>
+                  <a:pt x="1412885" y="3483429"/>
+                </a:lnTo>
+                <a:lnTo>
+                  <a:pt x="1392701" y="3483429"/>
+                </a:lnTo>
+                <a:lnTo>
+                  <a:pt x="1372517" y="3483429"/>
+                </a:lnTo>
+                <a:lnTo>
+                  <a:pt x="1352333" y="3483429"/>
+                </a:lnTo>
+                <a:lnTo>
+                  <a:pt x="1332149" y="3483429"/>
+                </a:lnTo>
+                <a:lnTo>
+                  <a:pt x="1311965" y="3483429"/>
+                </a:lnTo>
+                <a:lnTo>
+                  <a:pt x="1291781" y="3483429"/>
+                </a:lnTo>
+                <a:lnTo>
+                  <a:pt x="1271597" y="3483429"/>
+                </a:lnTo>
+                <a:lnTo>
+                  <a:pt x="1251412" y="3483429"/>
+                </a:lnTo>
+                <a:lnTo>
+                  <a:pt x="1231228" y="3483429"/>
+                </a:lnTo>
+                <a:lnTo>
+                  <a:pt x="1211044" y="3483429"/>
+                </a:lnTo>
+                <a:lnTo>
+                  <a:pt x="1190860" y="3483429"/>
+                </a:lnTo>
+                <a:lnTo>
+                  <a:pt x="1170676" y="3483429"/>
+                </a:lnTo>
+                <a:lnTo>
+                  <a:pt x="1150492" y="3483429"/>
+                </a:lnTo>
+                <a:lnTo>
+                  <a:pt x="1130308" y="3483429"/>
+                </a:lnTo>
+                <a:lnTo>
+                  <a:pt x="1110124" y="3483429"/>
+                </a:lnTo>
+                <a:lnTo>
+                  <a:pt x="1089940" y="3483429"/>
+                </a:lnTo>
+                <a:lnTo>
+                  <a:pt x="1069756" y="3483429"/>
+                </a:lnTo>
+                <a:lnTo>
+                  <a:pt x="1049572" y="3483429"/>
+                </a:lnTo>
+                <a:lnTo>
+                  <a:pt x="1029388" y="3483429"/>
+                </a:lnTo>
+                <a:lnTo>
+                  <a:pt x="1009204" y="3483429"/>
+                </a:lnTo>
+                <a:lnTo>
+                  <a:pt x="989019" y="3483429"/>
+                </a:lnTo>
+                <a:lnTo>
+                  <a:pt x="968835" y="3483429"/>
+                </a:lnTo>
+                <a:lnTo>
+                  <a:pt x="948651" y="3483429"/>
+                </a:lnTo>
+                <a:lnTo>
+                  <a:pt x="928467" y="3483429"/>
+                </a:lnTo>
+                <a:lnTo>
+                  <a:pt x="908283" y="3483429"/>
+                </a:lnTo>
+                <a:lnTo>
+                  <a:pt x="888099" y="3483429"/>
+                </a:lnTo>
+                <a:lnTo>
+                  <a:pt x="867915" y="3483429"/>
+                </a:lnTo>
+                <a:lnTo>
+                  <a:pt x="847731" y="3483429"/>
+                </a:lnTo>
+                <a:lnTo>
+                  <a:pt x="827547" y="3483429"/>
+                </a:lnTo>
+                <a:lnTo>
+                  <a:pt x="807363" y="3483429"/>
+                </a:lnTo>
+                <a:lnTo>
+                  <a:pt x="787179" y="3483429"/>
+                </a:lnTo>
+                <a:lnTo>
+                  <a:pt x="766995" y="3483429"/>
+                </a:lnTo>
+                <a:lnTo>
+                  <a:pt x="746810" y="3483429"/>
+                </a:lnTo>
+                <a:lnTo>
+                  <a:pt x="726626" y="3483429"/>
+                </a:lnTo>
+                <a:lnTo>
+                  <a:pt x="706442" y="3483429"/>
+                </a:lnTo>
+                <a:lnTo>
+                  <a:pt x="686258" y="3483429"/>
+                </a:lnTo>
+                <a:lnTo>
+                  <a:pt x="666074" y="3483429"/>
+                </a:lnTo>
+                <a:lnTo>
+                  <a:pt x="645890" y="3483429"/>
+                </a:lnTo>
+                <a:lnTo>
+                  <a:pt x="625706" y="3483429"/>
+                </a:lnTo>
+                <a:lnTo>
+                  <a:pt x="605522" y="3483429"/>
+                </a:lnTo>
+                <a:lnTo>
+                  <a:pt x="585338" y="3483429"/>
+                </a:lnTo>
+                <a:lnTo>
+                  <a:pt x="565154" y="3483429"/>
+                </a:lnTo>
+                <a:lnTo>
+                  <a:pt x="544970" y="3483429"/>
+                </a:lnTo>
+                <a:lnTo>
+                  <a:pt x="524786" y="3483429"/>
+                </a:lnTo>
+                <a:lnTo>
+                  <a:pt x="504602" y="3483429"/>
+                </a:lnTo>
+                <a:lnTo>
+                  <a:pt x="484417" y="3483429"/>
+                </a:lnTo>
+                <a:lnTo>
+                  <a:pt x="464233" y="3483429"/>
+                </a:lnTo>
+                <a:lnTo>
+                  <a:pt x="444049" y="3483429"/>
+                </a:lnTo>
+                <a:lnTo>
+                  <a:pt x="423865" y="3483429"/>
+                </a:lnTo>
+                <a:lnTo>
+                  <a:pt x="403681" y="3483429"/>
+                </a:lnTo>
+                <a:lnTo>
+                  <a:pt x="383497" y="3483429"/>
+                </a:lnTo>
+                <a:lnTo>
+                  <a:pt x="363313" y="3483429"/>
+                </a:lnTo>
+                <a:lnTo>
+                  <a:pt x="343129" y="3483429"/>
+                </a:lnTo>
+                <a:lnTo>
+                  <a:pt x="322945" y="3483429"/>
+                </a:lnTo>
+                <a:lnTo>
+                  <a:pt x="302761" y="3483429"/>
+                </a:lnTo>
+                <a:lnTo>
+                  <a:pt x="282577" y="3483429"/>
+                </a:lnTo>
+                <a:lnTo>
+                  <a:pt x="262393" y="3483429"/>
+                </a:lnTo>
+                <a:lnTo>
+                  <a:pt x="242208" y="3483429"/>
+                </a:lnTo>
+                <a:lnTo>
+                  <a:pt x="222024" y="3483429"/>
+                </a:lnTo>
+                <a:lnTo>
+                  <a:pt x="201840" y="3483429"/>
+                </a:lnTo>
+                <a:lnTo>
+                  <a:pt x="181656" y="3483429"/>
+                </a:lnTo>
+                <a:lnTo>
+                  <a:pt x="161472" y="3483429"/>
+                </a:lnTo>
+                <a:lnTo>
+                  <a:pt x="141288" y="3483429"/>
+                </a:lnTo>
+                <a:lnTo>
+                  <a:pt x="121104" y="3483429"/>
+                </a:lnTo>
+                <a:lnTo>
+                  <a:pt x="100920" y="3483429"/>
+                </a:lnTo>
+                <a:lnTo>
+                  <a:pt x="80736" y="3483429"/>
+                </a:lnTo>
+                <a:lnTo>
+                  <a:pt x="60552" y="3483429"/>
+                </a:lnTo>
+                <a:lnTo>
+                  <a:pt x="40368" y="3483429"/>
+                </a:lnTo>
+                <a:lnTo>
+                  <a:pt x="20184" y="3483429"/>
+                </a:lnTo>
+                <a:lnTo>
+                  <a:pt x="0" y="3483429"/>
+                </a:lnTo>
+                <a:close/>
+              </a:path>
+            </a:pathLst>
+          </a:custGeom>
+          <a:solidFill>
+            <a:srgbClr val="F2B880">
+              <a:alpha val="18000"/>
+            </a:srgbClr>
+          </a:solidFill>
+          <a:ln w="10160">
+            <a:solidFill>
+              <a:srgbClr val="F2B880">
+                <a:alpha val="18000"/>
+              </a:srgbClr>
+            </a:solidFill>
+          </a:ln>
+          <a:effectLst/>
+        </p:spPr>
+        <p:txBody>
+          <a:bodyPr rtlCol="0" anchor="ctr"/>
+          <a:lstStyle/>
+          <a:p>
+            <a:pPr algn="ctr"/>
+          </a:p>
+        </p:txBody>
+      </p:sp>
+      <p:sp>
+        <p:nvSpPr>
+          <p:cNvPr id="52" name="C2-E05 ellipse 50" descr="sci-ppt:o050"/>
+          <p:cNvSpPr/>
+          <p:nvPr/>
+        </p:nvSpPr>
+        <p:spPr>
+          <a:xfrm>
+            <a:off x="7013448" y="3674566"/>
+            <a:ext cx="146304" cy="146304"/>
+          </a:xfrm>
+          <a:prstGeom prst="ellipse">
+            <a:avLst/>
+          </a:prstGeom>
+          <a:solidFill>
+            <a:srgbClr val="F2B880"/>
+          </a:solidFill>
+          <a:ln w="12700">
+            <a:solidFill>
+              <a:srgbClr val="F2B880"/>
+            </a:solidFill>
+          </a:ln>
+          <a:effectLst/>
+        </p:spPr>
+        <p:txBody>
+          <a:bodyPr rtlCol="0" anchor="ctr"/>
+          <a:lstStyle/>
+          <a:p>
+            <a:pPr algn="ctr"/>
+          </a:p>
+        </p:txBody>
+      </p:sp>
+      <p:cxnSp>
+        <p:nvCxnSpPr>
+          <p:cNvPr id="53" name="C2-E05 line 51" descr="sci-ppt:o051"/>
+          <p:cNvCxnSpPr/>
+          <p:nvPr/>
+        </p:nvCxnSpPr>
+        <p:spPr>
+          <a:xfrm>
+            <a:off x="7086600" y="1371600"/>
+            <a:ext cx="0" cy="3657600"/>
+          </a:xfrm>
+          <a:prstGeom prst="line">
+            <a:avLst/>
+          </a:prstGeom>
+          <a:ln w="16510">
+            <a:solidFill>
+              <a:srgbClr val="F2B880"/>
+            </a:solidFill>
+            <a:prstDash val="dash"/>
+          </a:ln>
+          <a:effectLst/>
+        </p:spPr>
+      </p:cxnSp>
+      <p:sp>
+        <p:nvSpPr>
+          <p:cNvPr id="54" name="C2-E05 text 52" descr="sci-ppt:o052"/>
           <p:cNvSpPr txBox="1"/>
           <p:nvPr/>
         </p:nvSpPr>
         <p:spPr>
           <a:xfrm>
-            <a:off x="365760" y="5266944"/>
-            <a:ext cx="5547360" cy="321259"/>
+            <a:off x="7223760" y="3244798"/>
+            <a:ext cx="3291840" cy="239395"/>
           </a:xfrm>
           <a:prstGeom prst="rect">
             <a:avLst/>
@@ -3522,7 +6955,7 @@
           <a:effectLst/>
         </p:spPr>
         <p:txBody>
-          <a:bodyPr wrap="none" lIns="27432" rIns="27432" tIns="18288" bIns="18288" anchor="ctr">
+          <a:bodyPr wrap="none" lIns="18288" rIns="18288" tIns="18288" bIns="18288" anchor="t">
             <a:spAutoFit/>
           </a:bodyPr>
           <a:lstStyle/>
@@ -3533,27 +6966,139 @@
               </a:spcAft>
             </a:pPr>
             <a:r>
-              <a:rPr sz="1632" b="0" i="0">
+              <a:rPr sz="1250" b="0" i="0">
+                <a:solidFill>
+                  <a:srgbClr val="F2B880"/>
+                </a:solidFill>
+                <a:latin typeface="Arial"/>
+              </a:rPr>
+              <a:t>1/μₐ = 5 µm: I = Iᵢₙ/e = 0.37 Iᵢₙ</a:t>
+            </a:r>
+          </a:p>
+        </p:txBody>
+      </p:sp>
+      <p:sp>
+        <p:nvSpPr>
+          <p:cNvPr id="55" name="C2-E05 text 53" descr="sci-ppt:o053"/>
+          <p:cNvSpPr txBox="1"/>
+          <p:nvPr/>
+        </p:nvSpPr>
+        <p:spPr>
+          <a:xfrm>
+            <a:off x="8366760" y="2325188"/>
+            <a:ext cx="2743200" cy="448563"/>
+          </a:xfrm>
+          <a:prstGeom prst="rect">
+            <a:avLst/>
+          </a:prstGeom>
+          <a:noFill/>
+          <a:effectLst/>
+        </p:spPr>
+        <p:txBody>
+          <a:bodyPr wrap="none" lIns="18288" rIns="18288" tIns="18288" bIns="18288" anchor="t">
+            <a:spAutoFit/>
+          </a:bodyPr>
+          <a:lstStyle/>
+          <a:p>
+            <a:pPr algn="l">
+              <a:spcAft>
+                <a:spcPts val="0"/>
+              </a:spcAft>
+            </a:pPr>
+            <a:r>
+              <a:rPr sz="1300" b="0" i="0">
+                <a:solidFill>
+                  <a:srgbClr val="8EDBD4"/>
+                </a:solidFill>
+                <a:latin typeface="Arial"/>
+              </a:rPr>
+              <a:t>I(z) = Iᵢₙ e^(−μₐ z)</a:t>
+            </a:r>
+          </a:p>
+          <a:p>
+            <a:pPr algn="l">
+              <a:spcAft>
+                <a:spcPts val="0"/>
+              </a:spcAft>
+            </a:pPr>
+            <a:r>
+              <a:rPr sz="1300" b="0" i="0">
+                <a:solidFill>
+                  <a:srgbClr val="8EDBD4"/>
+                </a:solidFill>
+                <a:latin typeface="Arial"/>
+              </a:rPr>
+              <a:t>μₐ = 2×10⁵ m⁻¹</a:t>
+            </a:r>
+          </a:p>
+        </p:txBody>
+      </p:sp>
+      <p:sp>
+        <p:nvSpPr>
+          <p:cNvPr id="56" name="C2-E05 text 54" descr="sci-ppt:o054"/>
+          <p:cNvSpPr txBox="1"/>
+          <p:nvPr/>
+        </p:nvSpPr>
+        <p:spPr>
+          <a:xfrm>
+            <a:off x="5577840" y="5733288"/>
+            <a:ext cx="6035040" cy="448563"/>
+          </a:xfrm>
+          <a:prstGeom prst="rect">
+            <a:avLst/>
+          </a:prstGeom>
+          <a:noFill/>
+          <a:effectLst/>
+        </p:spPr>
+        <p:txBody>
+          <a:bodyPr wrap="none" lIns="18288" rIns="18288" tIns="18288" bIns="18288" anchor="t">
+            <a:spAutoFit/>
+          </a:bodyPr>
+          <a:lstStyle/>
+          <a:p>
+            <a:pPr algn="l">
+              <a:spcAft>
+                <a:spcPts val="0"/>
+              </a:spcAft>
+            </a:pPr>
+            <a:r>
+              <a:rPr sz="1300" b="0" i="0">
                 <a:solidFill>
                   <a:srgbClr val="E7F0F3"/>
                 </a:solidFill>
                 <a:latin typeface="Arial"/>
               </a:rPr>
-              <a:t>I(z): transmitted beam</a:t>
-            </a:r>
-          </a:p>
-        </p:txBody>
-      </p:sp>
-      <p:sp>
-        <p:nvSpPr>
-          <p:cNvPr id="15" name="text14" descr="sci-ppt:C2-E05-014"/>
+              <a:t>Heat deposition follows the same curve: most of it lands within a</a:t>
+            </a:r>
+          </a:p>
+          <a:p>
+            <a:pPr algn="l">
+              <a:spcAft>
+                <a:spcPts val="0"/>
+              </a:spcAft>
+            </a:pPr>
+            <a:r>
+              <a:rPr sz="1300" b="0" i="0">
+                <a:solidFill>
+                  <a:srgbClr val="E7F0F3"/>
+                </a:solidFill>
+                <a:latin typeface="Arial"/>
+              </a:rPr>
+              <a:t>few 1/μₐ of the surface.</a:t>
+            </a:r>
+          </a:p>
+        </p:txBody>
+      </p:sp>
+      <p:sp>
+        <p:nvSpPr>
+          <p:cNvPr id="57" name="C2-E05 text 55" descr="sci-ppt:o055"/>
           <p:cNvSpPr txBox="1"/>
           <p:nvPr/>
         </p:nvSpPr>
         <p:spPr>
           <a:xfrm>
-            <a:off x="365760" y="5559552"/>
-            <a:ext cx="5547360" cy="321259"/>
+            <a:off x="320040" y="6510528"/>
+            <a:ext cx="11521440" cy="200660"/>
           </a:xfrm>
           <a:prstGeom prst="rect">
             <a:avLst/>
@@ -3562,7 +7107,7 @@
           <a:effectLst/>
         </p:spPr>
         <p:txBody>
-          <a:bodyPr wrap="none" lIns="27432" rIns="27432" tIns="18288" bIns="18288" anchor="ctr">
+          <a:bodyPr wrap="none" lIns="18288" rIns="18288" tIns="18288" bIns="18288" anchor="t">
             <a:spAutoFit/>
           </a:bodyPr>
           <a:lstStyle/>
@@ -3573,213 +7118,13 @@
               </a:spcAft>
             </a:pPr>
             <a:r>
-              <a:rPr sz="1632" b="0" i="0">
-                <a:solidFill>
-                  <a:srgbClr val="E7F0F3"/>
-                </a:solidFill>
-                <a:latin typeface="Arial"/>
-              </a:rPr>
-              <a:t>Q_abs: heat inside slab</a:t>
-            </a:r>
-          </a:p>
-        </p:txBody>
-      </p:sp>
-      <p:sp>
-        <p:nvSpPr>
-          <p:cNvPr id="16" name="text15" descr="sci-ppt:C2-E05-015"/>
-          <p:cNvSpPr txBox="1"/>
-          <p:nvPr/>
-        </p:nvSpPr>
-        <p:spPr>
-          <a:xfrm>
-            <a:off x="6156960" y="4974336"/>
-            <a:ext cx="5547360" cy="321259"/>
-          </a:xfrm>
-          <a:prstGeom prst="rect">
-            <a:avLst/>
-          </a:prstGeom>
-          <a:noFill/>
-          <a:effectLst/>
-        </p:spPr>
-        <p:txBody>
-          <a:bodyPr wrap="none" lIns="27432" rIns="27432" tIns="18288" bIns="18288" anchor="ctr">
-            <a:spAutoFit/>
-          </a:bodyPr>
-          <a:lstStyle/>
-          <a:p>
-            <a:pPr algn="l">
-              <a:spcAft>
-                <a:spcPts val="0"/>
-              </a:spcAft>
-            </a:pPr>
-            <a:r>
-              <a:rPr sz="1632" b="0" i="0">
-                <a:solidFill>
-                  <a:srgbClr val="E7F0F3"/>
-                </a:solidFill>
-                <a:latin typeface="Arial"/>
-              </a:rPr>
-              <a:t>I_in: entry face</a:t>
-            </a:r>
-          </a:p>
-        </p:txBody>
-      </p:sp>
-      <p:sp>
-        <p:nvSpPr>
-          <p:cNvPr id="17" name="text16" descr="sci-ppt:C2-E05-016"/>
-          <p:cNvSpPr txBox="1"/>
-          <p:nvPr/>
-        </p:nvSpPr>
-        <p:spPr>
-          <a:xfrm>
-            <a:off x="6156960" y="5266944"/>
-            <a:ext cx="5547360" cy="321259"/>
-          </a:xfrm>
-          <a:prstGeom prst="rect">
-            <a:avLst/>
-          </a:prstGeom>
-          <a:noFill/>
-          <a:effectLst/>
-        </p:spPr>
-        <p:txBody>
-          <a:bodyPr wrap="none" lIns="27432" rIns="27432" tIns="18288" bIns="18288" anchor="ctr">
-            <a:spAutoFit/>
-          </a:bodyPr>
-          <a:lstStyle/>
-          <a:p>
-            <a:pPr algn="l">
-              <a:spcAft>
-                <a:spcPts val="0"/>
-              </a:spcAft>
-            </a:pPr>
-            <a:r>
-              <a:rPr sz="1632" b="0" i="0">
-                <a:solidFill>
-                  <a:srgbClr val="E7F0F3"/>
-                </a:solidFill>
-                <a:latin typeface="Arial"/>
-              </a:rPr>
-              <a:t>μ_a: absorption per depth</a:t>
-            </a:r>
-          </a:p>
-        </p:txBody>
-      </p:sp>
-      <p:sp>
-        <p:nvSpPr>
-          <p:cNvPr id="18" name="text17" descr="sci-ppt:C2-E05-017"/>
-          <p:cNvSpPr txBox="1"/>
-          <p:nvPr/>
-        </p:nvSpPr>
-        <p:spPr>
-          <a:xfrm>
-            <a:off x="6156960" y="5559552"/>
-            <a:ext cx="5547360" cy="321259"/>
-          </a:xfrm>
-          <a:prstGeom prst="rect">
-            <a:avLst/>
-          </a:prstGeom>
-          <a:noFill/>
-          <a:effectLst/>
-        </p:spPr>
-        <p:txBody>
-          <a:bodyPr wrap="none" lIns="27432" rIns="27432" tIns="18288" bIns="18288" anchor="ctr">
-            <a:spAutoFit/>
-          </a:bodyPr>
-          <a:lstStyle/>
-          <a:p>
-            <a:pPr algn="l">
-              <a:spcAft>
-                <a:spcPts val="0"/>
-              </a:spcAft>
-            </a:pPr>
-            <a:r>
-              <a:rPr sz="1632" b="0" i="0">
-                <a:solidFill>
-                  <a:srgbClr val="E7F0F3"/>
-                </a:solidFill>
-                <a:latin typeface="Arial"/>
-              </a:rPr>
-              <a:t>I′, z′: integration variables</a:t>
-            </a:r>
-          </a:p>
-        </p:txBody>
-      </p:sp>
-      <p:sp>
-        <p:nvSpPr>
-          <p:cNvPr id="19" name="text18" descr="sci-ppt:C2-E05-018"/>
-          <p:cNvSpPr txBox="1"/>
-          <p:nvPr/>
-        </p:nvSpPr>
-        <p:spPr>
-          <a:xfrm>
-            <a:off x="365760" y="6278880"/>
-            <a:ext cx="11277600" cy="302361"/>
-          </a:xfrm>
-          <a:prstGeom prst="rect">
-            <a:avLst/>
-          </a:prstGeom>
-          <a:noFill/>
-          <a:effectLst/>
-        </p:spPr>
-        <p:txBody>
-          <a:bodyPr wrap="none" lIns="27432" rIns="27432" tIns="18288" bIns="18288" anchor="ctr">
-            <a:spAutoFit/>
-          </a:bodyPr>
-          <a:lstStyle/>
-          <a:p>
-            <a:pPr algn="l">
-              <a:spcAft>
-                <a:spcPts val="0"/>
-              </a:spcAft>
-            </a:pPr>
-            <a:r>
-              <a:rPr sz="1536" b="0" i="0">
+              <a:rPr sz="1000" b="0" i="0">
                 <a:solidFill>
                   <a:srgbClr val="B4C7D2"/>
                 </a:solidFill>
                 <a:latin typeface="Arial"/>
               </a:rPr>
-              <a:t>Positive z points into absorber</a:t>
-            </a:r>
-          </a:p>
-        </p:txBody>
-      </p:sp>
-      <p:sp>
-        <p:nvSpPr>
-          <p:cNvPr id="20" name="text19" descr="sci-ppt:C2-E05-019"/>
-          <p:cNvSpPr txBox="1"/>
-          <p:nvPr/>
-        </p:nvSpPr>
-        <p:spPr>
-          <a:xfrm>
-            <a:off x="365760" y="6571488"/>
-            <a:ext cx="11277600" cy="302361"/>
-          </a:xfrm>
-          <a:prstGeom prst="rect">
-            <a:avLst/>
-          </a:prstGeom>
-          <a:noFill/>
-          <a:effectLst/>
-        </p:spPr>
-        <p:txBody>
-          <a:bodyPr wrap="none" lIns="27432" rIns="27432" tIns="18288" bIns="18288" anchor="ctr">
-            <a:spAutoFit/>
-          </a:bodyPr>
-          <a:lstStyle/>
-          <a:p>
-            <a:pPr algn="l">
-              <a:spcAft>
-                <a:spcPts val="0"/>
-              </a:spcAft>
-            </a:pPr>
-            <a:r>
-              <a:rPr sz="1536" b="0" i="0">
-                <a:solidFill>
-                  <a:srgbClr val="B4C7D2"/>
-                </a:solidFill>
-                <a:latin typeface="Arial"/>
-              </a:rPr>
-              <a:t>Photon power lost from beam becomes thermal source under this model</a:t>
+              <a:t>Beer–Lambert decay of Eq. C2-E05 with the teaching absorption coefficient.</a:t>
             </a:r>
           </a:p>
         </p:txBody>
